--- a/content/2026-2/cea055-estatistica-probabilidade/13-modelos-continuos-ii-normal/Aula_13_Modelos_Continuos_II_Normal_SITE.pptx
+++ b/content/2026-2/cea055-estatistica-probabilidade/13-modelos-continuos-ii-normal/Aula_13_Modelos_Continuos_II_Normal_SITE.pptx
@@ -254,7 +254,7 @@
           <a:p>
             <a:fld id="{44623A65-BD25-40B6-8815-498297225DF7}" type="datetimeFigureOut">
               <a:rPr lang="pt-BR" smtClean="0"/>
-              <a:t>12/10/2026</a:t>
+              <a:t>22/10/2026</a:t>
             </a:fld>
             <a:endParaRPr lang="pt-BR" dirty="0"/>
           </a:p>
@@ -668,7 +668,7 @@
           <a:p>
             <a:fld id="{5B45E566-B383-4B2D-B951-1136FD38326E}" type="datetimeFigureOut">
               <a:rPr lang="pt-BR" smtClean="0"/>
-              <a:t>12/10/2026</a:t>
+              <a:t>22/10/2026</a:t>
             </a:fld>
             <a:endParaRPr lang="pt-BR" dirty="0"/>
           </a:p>
@@ -866,7 +866,7 @@
           <a:p>
             <a:fld id="{5B45E566-B383-4B2D-B951-1136FD38326E}" type="datetimeFigureOut">
               <a:rPr lang="pt-BR" smtClean="0"/>
-              <a:t>12/10/2026</a:t>
+              <a:t>22/10/2026</a:t>
             </a:fld>
             <a:endParaRPr lang="pt-BR" dirty="0"/>
           </a:p>
@@ -1074,7 +1074,7 @@
           <a:p>
             <a:fld id="{5B45E566-B383-4B2D-B951-1136FD38326E}" type="datetimeFigureOut">
               <a:rPr lang="pt-BR" smtClean="0"/>
-              <a:t>12/10/2026</a:t>
+              <a:t>22/10/2026</a:t>
             </a:fld>
             <a:endParaRPr lang="pt-BR" dirty="0"/>
           </a:p>
@@ -1272,7 +1272,7 @@
           <a:p>
             <a:fld id="{5B45E566-B383-4B2D-B951-1136FD38326E}" type="datetimeFigureOut">
               <a:rPr lang="pt-BR" smtClean="0"/>
-              <a:t>12/10/2026</a:t>
+              <a:t>22/10/2026</a:t>
             </a:fld>
             <a:endParaRPr lang="pt-BR" dirty="0"/>
           </a:p>
@@ -1547,7 +1547,7 @@
           <a:p>
             <a:fld id="{5B45E566-B383-4B2D-B951-1136FD38326E}" type="datetimeFigureOut">
               <a:rPr lang="pt-BR" smtClean="0"/>
-              <a:t>12/10/2026</a:t>
+              <a:t>22/10/2026</a:t>
             </a:fld>
             <a:endParaRPr lang="pt-BR" dirty="0"/>
           </a:p>
@@ -1812,7 +1812,7 @@
           <a:p>
             <a:fld id="{5B45E566-B383-4B2D-B951-1136FD38326E}" type="datetimeFigureOut">
               <a:rPr lang="pt-BR" smtClean="0"/>
-              <a:t>12/10/2026</a:t>
+              <a:t>22/10/2026</a:t>
             </a:fld>
             <a:endParaRPr lang="pt-BR" dirty="0"/>
           </a:p>
@@ -2224,7 +2224,7 @@
           <a:p>
             <a:fld id="{5B45E566-B383-4B2D-B951-1136FD38326E}" type="datetimeFigureOut">
               <a:rPr lang="pt-BR" smtClean="0"/>
-              <a:t>12/10/2026</a:t>
+              <a:t>22/10/2026</a:t>
             </a:fld>
             <a:endParaRPr lang="pt-BR" dirty="0"/>
           </a:p>
@@ -2365,7 +2365,7 @@
           <a:p>
             <a:fld id="{5B45E566-B383-4B2D-B951-1136FD38326E}" type="datetimeFigureOut">
               <a:rPr lang="pt-BR" smtClean="0"/>
-              <a:t>12/10/2026</a:t>
+              <a:t>22/10/2026</a:t>
             </a:fld>
             <a:endParaRPr lang="pt-BR" dirty="0"/>
           </a:p>
@@ -2478,7 +2478,7 @@
           <a:p>
             <a:fld id="{5B45E566-B383-4B2D-B951-1136FD38326E}" type="datetimeFigureOut">
               <a:rPr lang="pt-BR" smtClean="0"/>
-              <a:t>12/10/2026</a:t>
+              <a:t>22/10/2026</a:t>
             </a:fld>
             <a:endParaRPr lang="pt-BR" dirty="0"/>
           </a:p>
@@ -2789,7 +2789,7 @@
           <a:p>
             <a:fld id="{5B45E566-B383-4B2D-B951-1136FD38326E}" type="datetimeFigureOut">
               <a:rPr lang="pt-BR" smtClean="0"/>
-              <a:t>12/10/2026</a:t>
+              <a:t>22/10/2026</a:t>
             </a:fld>
             <a:endParaRPr lang="pt-BR" dirty="0"/>
           </a:p>
@@ -3077,7 +3077,7 @@
           <a:p>
             <a:fld id="{5B45E566-B383-4B2D-B951-1136FD38326E}" type="datetimeFigureOut">
               <a:rPr lang="pt-BR" smtClean="0"/>
-              <a:t>12/10/2026</a:t>
+              <a:t>22/10/2026</a:t>
             </a:fld>
             <a:endParaRPr lang="pt-BR" dirty="0"/>
           </a:p>
@@ -3342,7 +3342,7 @@
           <a:p>
             <a:fld id="{5B45E566-B383-4B2D-B951-1136FD38326E}" type="datetimeFigureOut">
               <a:rPr lang="pt-BR" smtClean="0"/>
-              <a:t>12/10/2026</a:t>
+              <a:t>22/10/2026</a:t>
             </a:fld>
             <a:endParaRPr lang="pt-BR" dirty="0"/>
           </a:p>
@@ -3915,15 +3915,23 @@
             </a:pPr>
             <a:r>
               <a:rPr lang="pt-BR" sz="2400" dirty="0"/>
-              <a:t>Montgomery, Runger. </a:t>
+              <a:t>Montgomery, Runger</a:t>
             </a:r>
             <a:r>
-              <a:rPr lang="pt-BR" sz="2400" b="1" dirty="0"/>
-              <a:t>Applied Statistics and Probability for Engineers</a:t>
+              <a:rPr lang="pt-BR" sz="2400"/>
+              <a:t>. </a:t>
+            </a:r>
+            <a:r>
+              <a:rPr lang="pt-BR" sz="2400" b="1"/>
+              <a:t>Estatística Aplicada e Probabilidade para Engenheiros</a:t>
+            </a:r>
+            <a:r>
+              <a:rPr lang="pt-BR" sz="2400"/>
+              <a:t>, 7ª ed. — </a:t>
             </a:r>
             <a:r>
               <a:rPr lang="pt-BR" sz="2400" dirty="0"/>
-              <a:t>, 7th ed — Cap. 4 (4.5)</a:t>
+              <a:t>Cap. 4 (4.5)</a:t>
             </a:r>
           </a:p>
           <a:p>
@@ -4275,19 +4283,7 @@
                       <a:rPr lang="pt-BR" sz="2400" i="1" dirty="0" smtClean="0">
                         <a:latin typeface="Cambria Math" panose="02040503050406030204" pitchFamily="18" charset="0"/>
                       </a:rPr>
-                      <m:t>=</m:t>
-                    </m:r>
-                    <m:r>
-                      <a:rPr lang="pt-BR" sz="2400" i="1" dirty="0" smtClean="0">
-                        <a:latin typeface="Cambria Math" panose="02040503050406030204" pitchFamily="18" charset="0"/>
-                      </a:rPr>
-                      <m:t>0</m:t>
-                    </m:r>
-                    <m:r>
-                      <a:rPr lang="pt-BR" sz="2400" i="1" dirty="0" smtClean="0">
-                        <a:latin typeface="Cambria Math" panose="02040503050406030204" pitchFamily="18" charset="0"/>
-                      </a:rPr>
-                      <m:t>)</m:t>
+                      <m:t>=0)</m:t>
                     </m:r>
                   </m:oMath>
                 </a14:m>
@@ -4340,73 +4336,19 @@
                       <a:rPr lang="pt-BR" sz="2400" i="1" dirty="0" smtClean="0">
                         <a:latin typeface="Cambria Math" panose="02040503050406030204" pitchFamily="18" charset="0"/>
                       </a:rPr>
-                      <m:t>(</m:t>
+                      <m:t>(0≤</m:t>
                     </m:r>
                     <m:r>
                       <a:rPr lang="pt-BR" sz="2400" i="1" dirty="0" smtClean="0">
                         <a:latin typeface="Cambria Math" panose="02040503050406030204" pitchFamily="18" charset="0"/>
                       </a:rPr>
-                      <m:t>0</m:t>
+                      <m:t>𝑍</m:t>
                     </m:r>
                     <m:r>
                       <a:rPr lang="pt-BR" sz="2400" i="1" dirty="0" smtClean="0">
                         <a:latin typeface="Cambria Math" panose="02040503050406030204" pitchFamily="18" charset="0"/>
                       </a:rPr>
-                      <m:t>≤</m:t>
-                    </m:r>
-                    <m:r>
-                      <a:rPr lang="pt-BR" sz="2400" i="1" dirty="0" smtClean="0">
-                        <a:latin typeface="Cambria Math" panose="02040503050406030204" pitchFamily="18" charset="0"/>
-                      </a:rPr>
-                      <m:t>𝑍</m:t>
-                    </m:r>
-                    <m:r>
-                      <a:rPr lang="pt-BR" sz="2400" i="1" dirty="0" smtClean="0">
-                        <a:latin typeface="Cambria Math" panose="02040503050406030204" pitchFamily="18" charset="0"/>
-                      </a:rPr>
-                      <m:t>≤</m:t>
-                    </m:r>
-                    <m:r>
-                      <a:rPr lang="pt-BR" sz="2400" i="1" dirty="0" smtClean="0">
-                        <a:latin typeface="Cambria Math" panose="02040503050406030204" pitchFamily="18" charset="0"/>
-                      </a:rPr>
-                      <m:t>1</m:t>
-                    </m:r>
-                    <m:r>
-                      <a:rPr lang="pt-BR" sz="2400" i="1" dirty="0" smtClean="0">
-                        <a:latin typeface="Cambria Math" panose="02040503050406030204" pitchFamily="18" charset="0"/>
-                      </a:rPr>
-                      <m:t>,</m:t>
-                    </m:r>
-                    <m:r>
-                      <a:rPr lang="pt-BR" sz="2400" i="1" dirty="0" smtClean="0">
-                        <a:latin typeface="Cambria Math" panose="02040503050406030204" pitchFamily="18" charset="0"/>
-                      </a:rPr>
-                      <m:t>25</m:t>
-                    </m:r>
-                    <m:r>
-                      <a:rPr lang="pt-BR" sz="2400" i="1" dirty="0" smtClean="0">
-                        <a:latin typeface="Cambria Math" panose="02040503050406030204" pitchFamily="18" charset="0"/>
-                      </a:rPr>
-                      <m:t>)=</m:t>
-                    </m:r>
-                    <m:r>
-                      <a:rPr lang="pt-BR" sz="2400" i="1" dirty="0" smtClean="0">
-                        <a:latin typeface="Cambria Math" panose="02040503050406030204" pitchFamily="18" charset="0"/>
-                      </a:rPr>
-                      <m:t>0</m:t>
-                    </m:r>
-                    <m:r>
-                      <a:rPr lang="pt-BR" sz="2400" i="1" dirty="0" smtClean="0">
-                        <a:latin typeface="Cambria Math" panose="02040503050406030204" pitchFamily="18" charset="0"/>
-                      </a:rPr>
-                      <m:t>,</m:t>
-                    </m:r>
-                    <m:r>
-                      <a:rPr lang="pt-BR" sz="2400" i="1" dirty="0" smtClean="0">
-                        <a:latin typeface="Cambria Math" panose="02040503050406030204" pitchFamily="18" charset="0"/>
-                      </a:rPr>
-                      <m:t>3944</m:t>
+                      <m:t>≤1,25)=0,3944</m:t>
                     </m:r>
                   </m:oMath>
                 </a14:m>
@@ -5144,55 +5086,7 @@
                       <a:rPr lang="pt-BR" sz="2400" i="1" dirty="0" smtClean="0">
                         <a:latin typeface="Cambria Math" panose="02040503050406030204" pitchFamily="18" charset="0"/>
                       </a:rPr>
-                      <m:t> ≥ </m:t>
-                    </m:r>
-                    <m:r>
-                      <a:rPr lang="pt-BR" sz="2400" i="1" dirty="0" smtClean="0">
-                        <a:latin typeface="Cambria Math" panose="02040503050406030204" pitchFamily="18" charset="0"/>
-                      </a:rPr>
-                      <m:t>1</m:t>
-                    </m:r>
-                    <m:r>
-                      <a:rPr lang="pt-BR" sz="2400" i="1" dirty="0" smtClean="0">
-                        <a:latin typeface="Cambria Math" panose="02040503050406030204" pitchFamily="18" charset="0"/>
-                      </a:rPr>
-                      <m:t>,</m:t>
-                    </m:r>
-                    <m:r>
-                      <a:rPr lang="pt-BR" sz="2400" i="1" dirty="0" smtClean="0">
-                        <a:latin typeface="Cambria Math" panose="02040503050406030204" pitchFamily="18" charset="0"/>
-                      </a:rPr>
-                      <m:t>25</m:t>
-                    </m:r>
-                    <m:r>
-                      <a:rPr lang="pt-BR" sz="2400" i="1" dirty="0" smtClean="0">
-                        <a:latin typeface="Cambria Math" panose="02040503050406030204" pitchFamily="18" charset="0"/>
-                      </a:rPr>
-                      <m:t>) = </m:t>
-                    </m:r>
-                    <m:r>
-                      <a:rPr lang="pt-BR" sz="2400" i="1" dirty="0" smtClean="0">
-                        <a:latin typeface="Cambria Math" panose="02040503050406030204" pitchFamily="18" charset="0"/>
-                      </a:rPr>
-                      <m:t>0</m:t>
-                    </m:r>
-                    <m:r>
-                      <a:rPr lang="pt-BR" sz="2400" i="1" dirty="0" smtClean="0">
-                        <a:latin typeface="Cambria Math" panose="02040503050406030204" pitchFamily="18" charset="0"/>
-                      </a:rPr>
-                      <m:t>,</m:t>
-                    </m:r>
-                    <m:r>
-                      <a:rPr lang="pt-BR" sz="2400" i="1" dirty="0" smtClean="0">
-                        <a:latin typeface="Cambria Math" panose="02040503050406030204" pitchFamily="18" charset="0"/>
-                      </a:rPr>
-                      <m:t>1056</m:t>
-                    </m:r>
-                    <m:r>
-                      <a:rPr lang="pt-BR" sz="2400" i="1" dirty="0" smtClean="0">
-                        <a:latin typeface="Cambria Math" panose="02040503050406030204" pitchFamily="18" charset="0"/>
-                      </a:rPr>
-                      <m:t>.</m:t>
+                      <m:t> ≥ 1,25) = 0,1056.</m:t>
                     </m:r>
                   </m:oMath>
                 </a14:m>
@@ -5243,91 +5137,7 @@
                         <a:rPr lang="pt-BR" sz="2400" i="1" dirty="0" smtClean="0">
                           <a:latin typeface="Cambria Math" panose="02040503050406030204" pitchFamily="18" charset="0"/>
                         </a:rPr>
-                        <m:t>≤</m:t>
-                      </m:r>
-                      <m:r>
-                        <a:rPr lang="pt-BR" sz="2400" i="1" dirty="0" smtClean="0">
-                          <a:latin typeface="Cambria Math" panose="02040503050406030204" pitchFamily="18" charset="0"/>
-                        </a:rPr>
-                        <m:t>1</m:t>
-                      </m:r>
-                      <m:r>
-                        <a:rPr lang="pt-BR" sz="2400" i="1" dirty="0" smtClean="0">
-                          <a:latin typeface="Cambria Math" panose="02040503050406030204" pitchFamily="18" charset="0"/>
-                        </a:rPr>
-                        <m:t>,</m:t>
-                      </m:r>
-                      <m:r>
-                        <a:rPr lang="pt-BR" sz="2400" i="1" dirty="0" smtClean="0">
-                          <a:latin typeface="Cambria Math" panose="02040503050406030204" pitchFamily="18" charset="0"/>
-                        </a:rPr>
-                        <m:t>25</m:t>
-                      </m:r>
-                      <m:r>
-                        <a:rPr lang="pt-BR" sz="2400" i="1" dirty="0" smtClean="0">
-                          <a:latin typeface="Cambria Math" panose="02040503050406030204" pitchFamily="18" charset="0"/>
-                        </a:rPr>
-                        <m:t>)=</m:t>
-                      </m:r>
-                      <m:r>
-                        <a:rPr lang="pt-BR" sz="2400" i="1" dirty="0" smtClean="0">
-                          <a:latin typeface="Cambria Math" panose="02040503050406030204" pitchFamily="18" charset="0"/>
-                        </a:rPr>
-                        <m:t>1</m:t>
-                      </m:r>
-                      <m:r>
-                        <a:rPr lang="pt-BR" sz="2400" i="1" dirty="0" smtClean="0">
-                          <a:latin typeface="Cambria Math" panose="02040503050406030204" pitchFamily="18" charset="0"/>
-                        </a:rPr>
-                        <m:t>−</m:t>
-                      </m:r>
-                      <m:r>
-                        <a:rPr lang="pt-BR" sz="2400" i="1" dirty="0" smtClean="0">
-                          <a:latin typeface="Cambria Math" panose="02040503050406030204" pitchFamily="18" charset="0"/>
-                        </a:rPr>
-                        <m:t>0</m:t>
-                      </m:r>
-                      <m:r>
-                        <a:rPr lang="pt-BR" sz="2400" i="1" dirty="0" smtClean="0">
-                          <a:latin typeface="Cambria Math" panose="02040503050406030204" pitchFamily="18" charset="0"/>
-                        </a:rPr>
-                        <m:t>,</m:t>
-                      </m:r>
-                      <m:r>
-                        <a:rPr lang="pt-BR" sz="2400" i="1" dirty="0" smtClean="0">
-                          <a:latin typeface="Cambria Math" panose="02040503050406030204" pitchFamily="18" charset="0"/>
-                        </a:rPr>
-                        <m:t>1056</m:t>
-                      </m:r>
-                      <m:r>
-                        <a:rPr lang="pt-BR" sz="2400" i="1" dirty="0" smtClean="0">
-                          <a:latin typeface="Cambria Math" panose="02040503050406030204" pitchFamily="18" charset="0"/>
-                        </a:rPr>
-                        <m:t>=</m:t>
-                      </m:r>
-                      <m:r>
-                        <a:rPr lang="pt-BR" sz="2400" i="1" dirty="0" smtClean="0">
-                          <a:latin typeface="Cambria Math" panose="02040503050406030204" pitchFamily="18" charset="0"/>
-                        </a:rPr>
-                        <m:t>0</m:t>
-                      </m:r>
-                      <m:r>
-                        <a:rPr lang="pt-BR" sz="2400" i="1" dirty="0" smtClean="0">
-                          <a:latin typeface="Cambria Math" panose="02040503050406030204" pitchFamily="18" charset="0"/>
-                        </a:rPr>
-                        <m:t>,</m:t>
-                      </m:r>
-                      <m:r>
-                        <a:rPr lang="pt-BR" sz="2400" i="1" dirty="0" smtClean="0">
-                          <a:latin typeface="Cambria Math" panose="02040503050406030204" pitchFamily="18" charset="0"/>
-                        </a:rPr>
-                        <m:t>8944</m:t>
-                      </m:r>
-                      <m:r>
-                        <a:rPr lang="pt-BR" sz="2400" i="1" dirty="0" smtClean="0">
-                          <a:latin typeface="Cambria Math" panose="02040503050406030204" pitchFamily="18" charset="0"/>
-                        </a:rPr>
-                        <m:t>.</m:t>
+                        <m:t>≤1,25)=1−0,1056=0,8944.</m:t>
                       </m:r>
                     </m:oMath>
                   </m:oMathPara>
@@ -5596,7 +5406,13 @@
                           <a:rPr lang="pt-BR" sz="2400" b="0" i="1" smtClean="0">
                             <a:latin typeface="Cambria Math" panose="02040503050406030204" pitchFamily="18" charset="0"/>
                           </a:rPr>
-                          <m:t>≥0</m:t>
+                          <m:t>≥</m:t>
+                        </m:r>
+                        <m:r>
+                          <a:rPr lang="pt-BR" sz="2400" b="0" i="1" smtClean="0">
+                            <a:latin typeface="Cambria Math" panose="02040503050406030204" pitchFamily="18" charset="0"/>
+                          </a:rPr>
+                          <m:t>0</m:t>
                         </m:r>
                       </m:e>
                     </m:d>
@@ -5630,7 +5446,19 @@
                       <a:rPr lang="pt-BR" sz="2400" b="0" i="1" smtClean="0">
                         <a:latin typeface="Cambria Math" panose="02040503050406030204" pitchFamily="18" charset="0"/>
                       </a:rPr>
-                      <m:t>≤0)</m:t>
+                      <m:t>≤</m:t>
+                    </m:r>
+                    <m:r>
+                      <a:rPr lang="pt-BR" sz="2400" b="0" i="1" smtClean="0">
+                        <a:latin typeface="Cambria Math" panose="02040503050406030204" pitchFamily="18" charset="0"/>
+                      </a:rPr>
+                      <m:t>0</m:t>
+                    </m:r>
+                    <m:r>
+                      <a:rPr lang="pt-BR" sz="2400" b="0" i="1" smtClean="0">
+                        <a:latin typeface="Cambria Math" panose="02040503050406030204" pitchFamily="18" charset="0"/>
+                      </a:rPr>
+                      <m:t>)</m:t>
                     </m:r>
                   </m:oMath>
                 </a14:m>
@@ -5679,7 +5507,19 @@
                       <a:rPr lang="pt-BR" sz="2400" b="0" i="1" smtClean="0">
                         <a:latin typeface="Cambria Math" panose="02040503050406030204" pitchFamily="18" charset="0"/>
                       </a:rPr>
-                      <m:t>≥1)</m:t>
+                      <m:t>≥</m:t>
+                    </m:r>
+                    <m:r>
+                      <a:rPr lang="pt-BR" sz="2400" b="0" i="1" smtClean="0">
+                        <a:latin typeface="Cambria Math" panose="02040503050406030204" pitchFamily="18" charset="0"/>
+                      </a:rPr>
+                      <m:t>1</m:t>
+                    </m:r>
+                    <m:r>
+                      <a:rPr lang="pt-BR" sz="2400" b="0" i="1" smtClean="0">
+                        <a:latin typeface="Cambria Math" panose="02040503050406030204" pitchFamily="18" charset="0"/>
+                      </a:rPr>
+                      <m:t>)</m:t>
                     </m:r>
                   </m:oMath>
                 </a14:m>
@@ -5713,19 +5553,43 @@
                       <a:rPr lang="pt-BR" sz="2400" b="0" i="1" smtClean="0">
                         <a:latin typeface="Cambria Math" panose="02040503050406030204" pitchFamily="18" charset="0"/>
                       </a:rPr>
-                      <m:t>(0≤</m:t>
+                      <m:t>(</m:t>
                     </m:r>
                     <m:r>
                       <a:rPr lang="pt-BR" sz="2400" b="0" i="1" smtClean="0">
                         <a:latin typeface="Cambria Math" panose="02040503050406030204" pitchFamily="18" charset="0"/>
                       </a:rPr>
-                      <m:t>𝑍</m:t>
+                      <m:t>0</m:t>
                     </m:r>
                     <m:r>
                       <a:rPr lang="pt-BR" sz="2400" b="0" i="1" smtClean="0">
                         <a:latin typeface="Cambria Math" panose="02040503050406030204" pitchFamily="18" charset="0"/>
                       </a:rPr>
-                      <m:t>≤1)</m:t>
+                      <m:t>≤</m:t>
+                    </m:r>
+                    <m:r>
+                      <a:rPr lang="pt-BR" sz="2400" b="0" i="1" smtClean="0">
+                        <a:latin typeface="Cambria Math" panose="02040503050406030204" pitchFamily="18" charset="0"/>
+                      </a:rPr>
+                      <m:t>𝑍</m:t>
+                    </m:r>
+                    <m:r>
+                      <a:rPr lang="pt-BR" sz="2400" b="0" i="1" smtClean="0">
+                        <a:latin typeface="Cambria Math" panose="02040503050406030204" pitchFamily="18" charset="0"/>
+                      </a:rPr>
+                      <m:t>≤</m:t>
+                    </m:r>
+                    <m:r>
+                      <a:rPr lang="pt-BR" sz="2400" b="0" i="1" smtClean="0">
+                        <a:latin typeface="Cambria Math" panose="02040503050406030204" pitchFamily="18" charset="0"/>
+                      </a:rPr>
+                      <m:t>1</m:t>
+                    </m:r>
+                    <m:r>
+                      <a:rPr lang="pt-BR" sz="2400" b="0" i="1" smtClean="0">
+                        <a:latin typeface="Cambria Math" panose="02040503050406030204" pitchFamily="18" charset="0"/>
+                      </a:rPr>
+                      <m:t>)</m:t>
                     </m:r>
                   </m:oMath>
                 </a14:m>
@@ -5759,19 +5623,67 @@
                       <a:rPr lang="pt-BR" sz="2400" b="0" i="1" smtClean="0">
                         <a:latin typeface="Cambria Math" panose="02040503050406030204" pitchFamily="18" charset="0"/>
                       </a:rPr>
-                      <m:t>(−0,5≤</m:t>
+                      <m:t>(−</m:t>
                     </m:r>
                     <m:r>
                       <a:rPr lang="pt-BR" sz="2400" b="0" i="1" smtClean="0">
                         <a:latin typeface="Cambria Math" panose="02040503050406030204" pitchFamily="18" charset="0"/>
                       </a:rPr>
-                      <m:t>𝑍</m:t>
+                      <m:t>0</m:t>
                     </m:r>
                     <m:r>
                       <a:rPr lang="pt-BR" sz="2400" b="0" i="1" smtClean="0">
                         <a:latin typeface="Cambria Math" panose="02040503050406030204" pitchFamily="18" charset="0"/>
                       </a:rPr>
-                      <m:t>≤0,5)</m:t>
+                      <m:t>,</m:t>
+                    </m:r>
+                    <m:r>
+                      <a:rPr lang="pt-BR" sz="2400" b="0" i="1" smtClean="0">
+                        <a:latin typeface="Cambria Math" panose="02040503050406030204" pitchFamily="18" charset="0"/>
+                      </a:rPr>
+                      <m:t>5</m:t>
+                    </m:r>
+                    <m:r>
+                      <a:rPr lang="pt-BR" sz="2400" b="0" i="1" smtClean="0">
+                        <a:latin typeface="Cambria Math" panose="02040503050406030204" pitchFamily="18" charset="0"/>
+                      </a:rPr>
+                      <m:t>≤</m:t>
+                    </m:r>
+                    <m:r>
+                      <a:rPr lang="pt-BR" sz="2400" b="0" i="1" smtClean="0">
+                        <a:latin typeface="Cambria Math" panose="02040503050406030204" pitchFamily="18" charset="0"/>
+                      </a:rPr>
+                      <m:t>𝑍</m:t>
+                    </m:r>
+                    <m:r>
+                      <a:rPr lang="pt-BR" sz="2400" b="0" i="1" smtClean="0">
+                        <a:latin typeface="Cambria Math" panose="02040503050406030204" pitchFamily="18" charset="0"/>
+                      </a:rPr>
+                      <m:t>≤</m:t>
+                    </m:r>
+                    <m:r>
+                      <a:rPr lang="pt-BR" sz="2400" b="0" i="1" smtClean="0">
+                        <a:latin typeface="Cambria Math" panose="02040503050406030204" pitchFamily="18" charset="0"/>
+                      </a:rPr>
+                      <m:t>0</m:t>
+                    </m:r>
+                    <m:r>
+                      <a:rPr lang="pt-BR" sz="2400" b="0" i="1" smtClean="0">
+                        <a:latin typeface="Cambria Math" panose="02040503050406030204" pitchFamily="18" charset="0"/>
+                      </a:rPr>
+                      <m:t>,</m:t>
+                    </m:r>
+                    <m:r>
+                      <a:rPr lang="pt-BR" sz="2400" b="0" i="1" smtClean="0">
+                        <a:latin typeface="Cambria Math" panose="02040503050406030204" pitchFamily="18" charset="0"/>
+                      </a:rPr>
+                      <m:t>5</m:t>
+                    </m:r>
+                    <m:r>
+                      <a:rPr lang="pt-BR" sz="2400" b="0" i="1" smtClean="0">
+                        <a:latin typeface="Cambria Math" panose="02040503050406030204" pitchFamily="18" charset="0"/>
+                      </a:rPr>
+                      <m:t>)</m:t>
                     </m:r>
                   </m:oMath>
                 </a14:m>
@@ -5817,7 +5729,19 @@
                       <a:rPr lang="pt-BR" sz="2400" b="0" i="1" smtClean="0">
                         <a:latin typeface="Cambria Math" panose="02040503050406030204" pitchFamily="18" charset="0"/>
                       </a:rPr>
-                      <m:t>&lt;−2)</m:t>
+                      <m:t>&lt;−</m:t>
+                    </m:r>
+                    <m:r>
+                      <a:rPr lang="pt-BR" sz="2400" b="0" i="1" smtClean="0">
+                        <a:latin typeface="Cambria Math" panose="02040503050406030204" pitchFamily="18" charset="0"/>
+                      </a:rPr>
+                      <m:t>2</m:t>
+                    </m:r>
+                    <m:r>
+                      <a:rPr lang="pt-BR" sz="2400" b="0" i="1" smtClean="0">
+                        <a:latin typeface="Cambria Math" panose="02040503050406030204" pitchFamily="18" charset="0"/>
+                      </a:rPr>
+                      <m:t>)</m:t>
                     </m:r>
                   </m:oMath>
                 </a14:m>
@@ -6047,7 +5971,19 @@
                       <a:rPr lang="pt-BR" sz="2400">
                         <a:latin typeface="Cambria Math"/>
                       </a:rPr>
-                      <m:t>(0≤</m:t>
+                      <m:t>(</m:t>
+                    </m:r>
+                    <m:r>
+                      <a:rPr lang="pt-BR" sz="2400">
+                        <a:latin typeface="Cambria Math"/>
+                      </a:rPr>
+                      <m:t>0</m:t>
+                    </m:r>
+                    <m:r>
+                      <a:rPr lang="pt-BR" sz="2400">
+                        <a:latin typeface="Cambria Math"/>
+                      </a:rPr>
+                      <m:t>≤</m:t>
                     </m:r>
                     <m:r>
                       <a:rPr lang="pt-BR" sz="2400">
@@ -6238,7 +6174,19 @@
                       <a:rPr lang="pt-BR" sz="2400">
                         <a:latin typeface="Cambria Math"/>
                       </a:rPr>
-                      <m:t>≥0)=</m:t>
+                      <m:t>≥</m:t>
+                    </m:r>
+                    <m:r>
+                      <a:rPr lang="pt-BR" sz="2400">
+                        <a:latin typeface="Cambria Math"/>
+                      </a:rPr>
+                      <m:t>0</m:t>
+                    </m:r>
+                    <m:r>
+                      <a:rPr lang="pt-BR" sz="2400">
+                        <a:latin typeface="Cambria Math"/>
+                      </a:rPr>
+                      <m:t>)=</m:t>
                     </m:r>
                     <m:r>
                       <a:rPr lang="pt-BR" sz="2400">
@@ -6262,7 +6210,37 @@
                       <a:rPr lang="pt-BR" sz="2400">
                         <a:latin typeface="Cambria Math"/>
                       </a:rPr>
-                      <m:t>≤0)=0,5</m:t>
+                      <m:t>≤</m:t>
+                    </m:r>
+                    <m:r>
+                      <a:rPr lang="pt-BR" sz="2400">
+                        <a:latin typeface="Cambria Math"/>
+                      </a:rPr>
+                      <m:t>0</m:t>
+                    </m:r>
+                    <m:r>
+                      <a:rPr lang="pt-BR" sz="2400">
+                        <a:latin typeface="Cambria Math"/>
+                      </a:rPr>
+                      <m:t>)=</m:t>
+                    </m:r>
+                    <m:r>
+                      <a:rPr lang="pt-BR" sz="2400">
+                        <a:latin typeface="Cambria Math"/>
+                      </a:rPr>
+                      <m:t>0</m:t>
+                    </m:r>
+                    <m:r>
+                      <a:rPr lang="pt-BR" sz="2400">
+                        <a:latin typeface="Cambria Math"/>
+                      </a:rPr>
+                      <m:t>,</m:t>
+                    </m:r>
+                    <m:r>
+                      <a:rPr lang="pt-BR" sz="2400">
+                        <a:latin typeface="Cambria Math"/>
+                      </a:rPr>
+                      <m:t>5</m:t>
                     </m:r>
                   </m:oMath>
                 </a14:m>
@@ -6372,7 +6350,43 @@
                       <a:rPr lang="pt-BR" sz="2400">
                         <a:latin typeface="Cambria Math"/>
                       </a:rPr>
-                      <m:t>≥1)=0,5−</m:t>
+                      <m:t>≥</m:t>
+                    </m:r>
+                    <m:r>
+                      <a:rPr lang="pt-BR" sz="2400">
+                        <a:latin typeface="Cambria Math"/>
+                      </a:rPr>
+                      <m:t>1</m:t>
+                    </m:r>
+                    <m:r>
+                      <a:rPr lang="pt-BR" sz="2400">
+                        <a:latin typeface="Cambria Math"/>
+                      </a:rPr>
+                      <m:t>)=</m:t>
+                    </m:r>
+                    <m:r>
+                      <a:rPr lang="pt-BR" sz="2400">
+                        <a:latin typeface="Cambria Math"/>
+                      </a:rPr>
+                      <m:t>0</m:t>
+                    </m:r>
+                    <m:r>
+                      <a:rPr lang="pt-BR" sz="2400">
+                        <a:latin typeface="Cambria Math"/>
+                      </a:rPr>
+                      <m:t>,</m:t>
+                    </m:r>
+                    <m:r>
+                      <a:rPr lang="pt-BR" sz="2400">
+                        <a:latin typeface="Cambria Math"/>
+                      </a:rPr>
+                      <m:t>5</m:t>
+                    </m:r>
+                    <m:r>
+                      <a:rPr lang="pt-BR" sz="2400">
+                        <a:latin typeface="Cambria Math"/>
+                      </a:rPr>
+                      <m:t>−</m:t>
                     </m:r>
                     <m:r>
                       <a:rPr lang="pt-BR" sz="2400">
@@ -6384,7 +6398,19 @@
                       <a:rPr lang="pt-BR" sz="2400">
                         <a:latin typeface="Cambria Math"/>
                       </a:rPr>
-                      <m:t>(0≤</m:t>
+                      <m:t>(</m:t>
+                    </m:r>
+                    <m:r>
+                      <a:rPr lang="pt-BR" sz="2400">
+                        <a:latin typeface="Cambria Math"/>
+                      </a:rPr>
+                      <m:t>0</m:t>
+                    </m:r>
+                    <m:r>
+                      <a:rPr lang="pt-BR" sz="2400">
+                        <a:latin typeface="Cambria Math"/>
+                      </a:rPr>
+                      <m:t>≤</m:t>
                     </m:r>
                     <m:r>
                       <a:rPr lang="pt-BR" sz="2400">
@@ -6396,7 +6422,85 @@
                       <a:rPr lang="pt-BR" sz="2400">
                         <a:latin typeface="Cambria Math"/>
                       </a:rPr>
-                      <m:t>≤1)=0,5−0,3413=0,1587</m:t>
+                      <m:t>≤</m:t>
+                    </m:r>
+                    <m:r>
+                      <a:rPr lang="pt-BR" sz="2400">
+                        <a:latin typeface="Cambria Math"/>
+                      </a:rPr>
+                      <m:t>1</m:t>
+                    </m:r>
+                    <m:r>
+                      <a:rPr lang="pt-BR" sz="2400">
+                        <a:latin typeface="Cambria Math"/>
+                      </a:rPr>
+                      <m:t>)=</m:t>
+                    </m:r>
+                    <m:r>
+                      <a:rPr lang="pt-BR" sz="2400">
+                        <a:latin typeface="Cambria Math"/>
+                      </a:rPr>
+                      <m:t>0</m:t>
+                    </m:r>
+                    <m:r>
+                      <a:rPr lang="pt-BR" sz="2400">
+                        <a:latin typeface="Cambria Math"/>
+                      </a:rPr>
+                      <m:t>,</m:t>
+                    </m:r>
+                    <m:r>
+                      <a:rPr lang="pt-BR" sz="2400">
+                        <a:latin typeface="Cambria Math"/>
+                      </a:rPr>
+                      <m:t>5</m:t>
+                    </m:r>
+                    <m:r>
+                      <a:rPr lang="pt-BR" sz="2400">
+                        <a:latin typeface="Cambria Math"/>
+                      </a:rPr>
+                      <m:t>−</m:t>
+                    </m:r>
+                    <m:r>
+                      <a:rPr lang="pt-BR" sz="2400">
+                        <a:latin typeface="Cambria Math"/>
+                      </a:rPr>
+                      <m:t>0</m:t>
+                    </m:r>
+                    <m:r>
+                      <a:rPr lang="pt-BR" sz="2400">
+                        <a:latin typeface="Cambria Math"/>
+                      </a:rPr>
+                      <m:t>,</m:t>
+                    </m:r>
+                    <m:r>
+                      <a:rPr lang="pt-BR" sz="2400">
+                        <a:latin typeface="Cambria Math"/>
+                      </a:rPr>
+                      <m:t>3413</m:t>
+                    </m:r>
+                    <m:r>
+                      <a:rPr lang="pt-BR" sz="2400">
+                        <a:latin typeface="Cambria Math"/>
+                      </a:rPr>
+                      <m:t>=</m:t>
+                    </m:r>
+                    <m:r>
+                      <a:rPr lang="pt-BR" sz="2400">
+                        <a:latin typeface="Cambria Math"/>
+                      </a:rPr>
+                      <m:t>0</m:t>
+                    </m:r>
+                    <m:r>
+                      <a:rPr lang="pt-BR" sz="2400">
+                        <a:latin typeface="Cambria Math"/>
+                      </a:rPr>
+                      <m:t>,</m:t>
+                    </m:r>
+                    <m:r>
+                      <a:rPr lang="pt-BR" sz="2400">
+                        <a:latin typeface="Cambria Math"/>
+                      </a:rPr>
+                      <m:t>1587</m:t>
                     </m:r>
                   </m:oMath>
                 </a14:m>
@@ -6467,7 +6571,19 @@
                       <a:rPr lang="pt-BR" sz="2400">
                         <a:latin typeface="Cambria Math"/>
                       </a:rPr>
-                      <m:t>(0≤</m:t>
+                      <m:t>(</m:t>
+                    </m:r>
+                    <m:r>
+                      <a:rPr lang="pt-BR" sz="2400">
+                        <a:latin typeface="Cambria Math"/>
+                      </a:rPr>
+                      <m:t>0</m:t>
+                    </m:r>
+                    <m:r>
+                      <a:rPr lang="pt-BR" sz="2400">
+                        <a:latin typeface="Cambria Math"/>
+                      </a:rPr>
+                      <m:t>≤</m:t>
                     </m:r>
                     <m:r>
                       <a:rPr lang="pt-BR" sz="2400">
@@ -6479,7 +6595,37 @@
                       <a:rPr lang="pt-BR" sz="2400">
                         <a:latin typeface="Cambria Math"/>
                       </a:rPr>
-                      <m:t>≤1)=0,3413</m:t>
+                      <m:t>≤</m:t>
+                    </m:r>
+                    <m:r>
+                      <a:rPr lang="pt-BR" sz="2400">
+                        <a:latin typeface="Cambria Math"/>
+                      </a:rPr>
+                      <m:t>1</m:t>
+                    </m:r>
+                    <m:r>
+                      <a:rPr lang="pt-BR" sz="2400">
+                        <a:latin typeface="Cambria Math"/>
+                      </a:rPr>
+                      <m:t>)=</m:t>
+                    </m:r>
+                    <m:r>
+                      <a:rPr lang="pt-BR" sz="2400">
+                        <a:latin typeface="Cambria Math"/>
+                      </a:rPr>
+                      <m:t>0</m:t>
+                    </m:r>
+                    <m:r>
+                      <a:rPr lang="pt-BR" sz="2400">
+                        <a:latin typeface="Cambria Math"/>
+                      </a:rPr>
+                      <m:t>,</m:t>
+                    </m:r>
+                    <m:r>
+                      <a:rPr lang="pt-BR" sz="2400">
+                        <a:latin typeface="Cambria Math"/>
+                      </a:rPr>
+                      <m:t>3413</m:t>
                     </m:r>
                   </m:oMath>
                 </a14:m>
@@ -7390,7 +7536,19 @@
                       <a:rPr lang="pt-BR" sz="2400" b="0" i="1" smtClean="0">
                         <a:latin typeface="Cambria Math" panose="02040503050406030204" pitchFamily="18" charset="0"/>
                       </a:rPr>
-                      <m:t>&gt;0,</m:t>
+                      <m:t>&gt;</m:t>
+                    </m:r>
+                    <m:r>
+                      <a:rPr lang="pt-BR" sz="2400" b="0" i="1" smtClean="0">
+                        <a:latin typeface="Cambria Math" panose="02040503050406030204" pitchFamily="18" charset="0"/>
+                      </a:rPr>
+                      <m:t>0</m:t>
+                    </m:r>
+                    <m:r>
+                      <a:rPr lang="pt-BR" sz="2400" b="0" i="1" smtClean="0">
+                        <a:latin typeface="Cambria Math" panose="02040503050406030204" pitchFamily="18" charset="0"/>
+                      </a:rPr>
+                      <m:t>,</m:t>
                     </m:r>
                   </m:oMath>
                 </a14:m>
@@ -7452,7 +7610,25 @@
                       <a:rPr lang="pt-BR" sz="2400" b="0" i="1" smtClean="0">
                         <a:latin typeface="Cambria Math" panose="02040503050406030204" pitchFamily="18" charset="0"/>
                       </a:rPr>
-                      <m:t>=0,3</m:t>
+                      <m:t>=</m:t>
+                    </m:r>
+                    <m:r>
+                      <a:rPr lang="pt-BR" sz="2400" b="0" i="1" smtClean="0">
+                        <a:latin typeface="Cambria Math" panose="02040503050406030204" pitchFamily="18" charset="0"/>
+                      </a:rPr>
+                      <m:t>0</m:t>
+                    </m:r>
+                    <m:r>
+                      <a:rPr lang="pt-BR" sz="2400" b="0" i="1" smtClean="0">
+                        <a:latin typeface="Cambria Math" panose="02040503050406030204" pitchFamily="18" charset="0"/>
+                      </a:rPr>
+                      <m:t>,</m:t>
+                    </m:r>
+                    <m:r>
+                      <a:rPr lang="pt-BR" sz="2400" b="0" i="1" smtClean="0">
+                        <a:latin typeface="Cambria Math" panose="02040503050406030204" pitchFamily="18" charset="0"/>
+                      </a:rPr>
+                      <m:t>3</m:t>
                     </m:r>
                   </m:oMath>
                 </a14:m>
@@ -7536,7 +7712,25 @@
                       <a:rPr lang="pt-BR" sz="2400" b="0" i="1" smtClean="0">
                         <a:latin typeface="Cambria Math" panose="02040503050406030204" pitchFamily="18" charset="0"/>
                       </a:rPr>
-                      <m:t>=0,8</m:t>
+                      <m:t>=</m:t>
+                    </m:r>
+                    <m:r>
+                      <a:rPr lang="pt-BR" sz="2400" b="0" i="1" smtClean="0">
+                        <a:latin typeface="Cambria Math" panose="02040503050406030204" pitchFamily="18" charset="0"/>
+                      </a:rPr>
+                      <m:t>0</m:t>
+                    </m:r>
+                    <m:r>
+                      <a:rPr lang="pt-BR" sz="2400" b="0" i="1" smtClean="0">
+                        <a:latin typeface="Cambria Math" panose="02040503050406030204" pitchFamily="18" charset="0"/>
+                      </a:rPr>
+                      <m:t>,</m:t>
+                    </m:r>
+                    <m:r>
+                      <a:rPr lang="pt-BR" sz="2400" b="0" i="1" smtClean="0">
+                        <a:latin typeface="Cambria Math" panose="02040503050406030204" pitchFamily="18" charset="0"/>
+                      </a:rPr>
+                      <m:t>8</m:t>
                     </m:r>
                   </m:oMath>
                 </a14:m>
@@ -7579,7 +7773,13 @@
                           <a:rPr lang="pt-BR" sz="2400" b="0" i="1" smtClean="0">
                             <a:latin typeface="Cambria Math" panose="02040503050406030204" pitchFamily="18" charset="0"/>
                           </a:rPr>
-                          <m:t>0≤</m:t>
+                          <m:t>0</m:t>
+                        </m:r>
+                        <m:r>
+                          <a:rPr lang="pt-BR" sz="2400" b="0" i="1" smtClean="0">
+                            <a:latin typeface="Cambria Math" panose="02040503050406030204" pitchFamily="18" charset="0"/>
+                          </a:rPr>
+                          <m:t>≤</m:t>
                         </m:r>
                         <m:r>
                           <a:rPr lang="pt-BR" sz="2400" b="0" i="1" smtClean="0">
@@ -7605,7 +7805,25 @@
                       <a:rPr lang="pt-BR" sz="2400" b="0" i="1" smtClean="0">
                         <a:latin typeface="Cambria Math" panose="02040503050406030204" pitchFamily="18" charset="0"/>
                       </a:rPr>
-                      <m:t>=0,25</m:t>
+                      <m:t>=</m:t>
+                    </m:r>
+                    <m:r>
+                      <a:rPr lang="pt-BR" sz="2400" b="0" i="1" smtClean="0">
+                        <a:latin typeface="Cambria Math" panose="02040503050406030204" pitchFamily="18" charset="0"/>
+                      </a:rPr>
+                      <m:t>0</m:t>
+                    </m:r>
+                    <m:r>
+                      <a:rPr lang="pt-BR" sz="2400" b="0" i="1" smtClean="0">
+                        <a:latin typeface="Cambria Math" panose="02040503050406030204" pitchFamily="18" charset="0"/>
+                      </a:rPr>
+                      <m:t>,</m:t>
+                    </m:r>
+                    <m:r>
+                      <a:rPr lang="pt-BR" sz="2400" b="0" i="1" smtClean="0">
+                        <a:latin typeface="Cambria Math" panose="02040503050406030204" pitchFamily="18" charset="0"/>
+                      </a:rPr>
+                      <m:t>25</m:t>
                     </m:r>
                   </m:oMath>
                 </a14:m>
@@ -7668,7 +7886,25 @@
                       <a:rPr lang="pt-BR" sz="2400" i="1">
                         <a:latin typeface="Cambria Math" panose="02040503050406030204" pitchFamily="18" charset="0"/>
                       </a:rPr>
-                      <m:t>=0,1</m:t>
+                      <m:t>=</m:t>
+                    </m:r>
+                    <m:r>
+                      <a:rPr lang="pt-BR" sz="2400" i="1">
+                        <a:latin typeface="Cambria Math" panose="02040503050406030204" pitchFamily="18" charset="0"/>
+                      </a:rPr>
+                      <m:t>0</m:t>
+                    </m:r>
+                    <m:r>
+                      <a:rPr lang="pt-BR" sz="2400" i="1">
+                        <a:latin typeface="Cambria Math" panose="02040503050406030204" pitchFamily="18" charset="0"/>
+                      </a:rPr>
+                      <m:t>,</m:t>
+                    </m:r>
+                    <m:r>
+                      <a:rPr lang="pt-BR" sz="2400" i="1">
+                        <a:latin typeface="Cambria Math" panose="02040503050406030204" pitchFamily="18" charset="0"/>
+                      </a:rPr>
+                      <m:t>1</m:t>
                     </m:r>
                   </m:oMath>
                 </a14:m>
@@ -9090,13 +9326,13 @@
                       <a:rPr lang="pt-BR" sz="2400">
                         <a:latin typeface="Cambria Math"/>
                       </a:rPr>
-                      <m:t>(</m:t>
-                    </m:r>
-                    <m:r>
-                      <a:rPr lang="pt-BR" sz="2400">
-                        <a:latin typeface="Cambria Math"/>
-                      </a:rPr>
-                      <m:t>0</m:t>
+                      <m:t>(0≤</m:t>
+                    </m:r>
+                    <m:r>
+                      <a:rPr lang="pt-BR" sz="2400">
+                        <a:latin typeface="Cambria Math"/>
+                      </a:rPr>
+                      <m:t>𝑍</m:t>
                     </m:r>
                     <m:r>
                       <a:rPr lang="pt-BR" sz="2400">
@@ -9108,43 +9344,13 @@
                       <a:rPr lang="pt-BR" sz="2400">
                         <a:latin typeface="Cambria Math"/>
                       </a:rPr>
-                      <m:t>𝑍</m:t>
-                    </m:r>
-                    <m:r>
-                      <a:rPr lang="pt-BR" sz="2400">
-                        <a:latin typeface="Cambria Math"/>
-                      </a:rPr>
-                      <m:t>≤</m:t>
-                    </m:r>
-                    <m:r>
-                      <a:rPr lang="pt-BR" sz="2400">
-                        <a:latin typeface="Cambria Math"/>
-                      </a:rPr>
                       <m:t>𝑧</m:t>
                     </m:r>
                     <m:r>
                       <a:rPr lang="pt-BR" sz="2400">
                         <a:latin typeface="Cambria Math"/>
                       </a:rPr>
-                      <m:t>)=</m:t>
-                    </m:r>
-                    <m:r>
-                      <a:rPr lang="pt-BR" sz="2400">
-                        <a:latin typeface="Cambria Math"/>
-                      </a:rPr>
-                      <m:t>0</m:t>
-                    </m:r>
-                    <m:r>
-                      <a:rPr lang="pt-BR" sz="2400">
-                        <a:latin typeface="Cambria Math"/>
-                      </a:rPr>
-                      <m:t>,</m:t>
-                    </m:r>
-                    <m:r>
-                      <a:rPr lang="pt-BR" sz="2400">
-                        <a:latin typeface="Cambria Math"/>
-                      </a:rPr>
-                      <m:t>25</m:t>
+                      <m:t>)=0,25</m:t>
                     </m:r>
                   </m:oMath>
                 </a14:m>
@@ -9201,43 +9407,7 @@
                       <a:rPr lang="pt-BR" sz="2400">
                         <a:latin typeface="Cambria Math"/>
                       </a:rPr>
-                      <m:t>0</m:t>
-                    </m:r>
-                    <m:r>
-                      <a:rPr lang="pt-BR" sz="2400">
-                        <a:latin typeface="Cambria Math"/>
-                      </a:rPr>
-                      <m:t>,</m:t>
-                    </m:r>
-                    <m:r>
-                      <a:rPr lang="pt-BR" sz="2400">
-                        <a:latin typeface="Cambria Math"/>
-                      </a:rPr>
-                      <m:t>67</m:t>
-                    </m:r>
-                    <m:r>
-                      <a:rPr lang="pt-BR" sz="2400">
-                        <a:latin typeface="Cambria Math"/>
-                      </a:rPr>
-                      <m:t>→</m:t>
-                    </m:r>
-                    <m:r>
-                      <a:rPr lang="pt-BR" sz="2400">
-                        <a:latin typeface="Cambria Math"/>
-                      </a:rPr>
-                      <m:t>0</m:t>
-                    </m:r>
-                    <m:r>
-                      <a:rPr lang="pt-BR" sz="2400">
-                        <a:latin typeface="Cambria Math"/>
-                      </a:rPr>
-                      <m:t>,</m:t>
-                    </m:r>
-                    <m:r>
-                      <a:rPr lang="pt-BR" sz="2400">
-                        <a:latin typeface="Cambria Math"/>
-                      </a:rPr>
-                      <m:t>2486</m:t>
+                      <m:t>0,67→0,2486</m:t>
                     </m:r>
                   </m:oMath>
                 </a14:m>
@@ -9251,43 +9421,7 @@
                       <a:rPr lang="pt-BR" sz="2400">
                         <a:latin typeface="Cambria Math"/>
                       </a:rPr>
-                      <m:t>0</m:t>
-                    </m:r>
-                    <m:r>
-                      <a:rPr lang="pt-BR" sz="2400">
-                        <a:latin typeface="Cambria Math"/>
-                      </a:rPr>
-                      <m:t>,</m:t>
-                    </m:r>
-                    <m:r>
-                      <a:rPr lang="pt-BR" sz="2400">
-                        <a:latin typeface="Cambria Math"/>
-                      </a:rPr>
-                      <m:t>68</m:t>
-                    </m:r>
-                    <m:r>
-                      <a:rPr lang="pt-BR" sz="2400">
-                        <a:latin typeface="Cambria Math"/>
-                      </a:rPr>
-                      <m:t>→</m:t>
-                    </m:r>
-                    <m:r>
-                      <a:rPr lang="pt-BR" sz="2400">
-                        <a:latin typeface="Cambria Math"/>
-                      </a:rPr>
-                      <m:t>0</m:t>
-                    </m:r>
-                    <m:r>
-                      <a:rPr lang="pt-BR" sz="2400">
-                        <a:latin typeface="Cambria Math"/>
-                      </a:rPr>
-                      <m:t>,</m:t>
-                    </m:r>
-                    <m:r>
-                      <a:rPr lang="pt-BR" sz="2400">
-                        <a:latin typeface="Cambria Math"/>
-                      </a:rPr>
-                      <m:t>2517</m:t>
+                      <m:t>0,68→0,2517</m:t>
                     </m:r>
                   </m:oMath>
                 </a14:m>
@@ -9315,25 +9449,7 @@
                       <a:rPr lang="pt-BR" sz="2400">
                         <a:latin typeface="Cambria Math"/>
                       </a:rPr>
-                      <m:t>≈</m:t>
-                    </m:r>
-                    <m:r>
-                      <a:rPr lang="pt-BR" sz="2400">
-                        <a:latin typeface="Cambria Math"/>
-                      </a:rPr>
-                      <m:t>0</m:t>
-                    </m:r>
-                    <m:r>
-                      <a:rPr lang="pt-BR" sz="2400">
-                        <a:latin typeface="Cambria Math"/>
-                      </a:rPr>
-                      <m:t>,</m:t>
-                    </m:r>
-                    <m:r>
-                      <a:rPr lang="pt-BR" sz="2400">
-                        <a:latin typeface="Cambria Math"/>
-                      </a:rPr>
-                      <m:t>67</m:t>
+                      <m:t>≈0,67</m:t>
                     </m:r>
                   </m:oMath>
                 </a14:m>
@@ -9391,25 +9507,7 @@
                       <a:rPr lang="pt-BR" sz="2400">
                         <a:latin typeface="Cambria Math"/>
                       </a:rPr>
-                      <m:t>)=</m:t>
-                    </m:r>
-                    <m:r>
-                      <a:rPr lang="pt-BR" sz="2400">
-                        <a:latin typeface="Cambria Math"/>
-                      </a:rPr>
-                      <m:t>0</m:t>
-                    </m:r>
-                    <m:r>
-                      <a:rPr lang="pt-BR" sz="2400">
-                        <a:latin typeface="Cambria Math"/>
-                      </a:rPr>
-                      <m:t>,</m:t>
-                    </m:r>
-                    <m:r>
-                      <a:rPr lang="pt-BR" sz="2400">
-                        <a:latin typeface="Cambria Math"/>
-                      </a:rPr>
-                      <m:t>1</m:t>
+                      <m:t>)=0,1</m:t>
                     </m:r>
                   </m:oMath>
                 </a14:m>
@@ -9546,25 +9644,7 @@
                         <a:rPr lang="pt-BR" sz="2400">
                           <a:latin typeface="Cambria Math"/>
                         </a:rPr>
-                        <m:t>)=</m:t>
-                      </m:r>
-                      <m:r>
-                        <a:rPr lang="pt-BR" sz="2400">
-                          <a:latin typeface="Cambria Math"/>
-                        </a:rPr>
-                        <m:t>0</m:t>
-                      </m:r>
-                      <m:r>
-                        <a:rPr lang="pt-BR" sz="2400">
-                          <a:latin typeface="Cambria Math"/>
-                        </a:rPr>
-                        <m:t>,</m:t>
-                      </m:r>
-                      <m:r>
-                        <a:rPr lang="pt-BR" sz="2400">
-                          <a:latin typeface="Cambria Math"/>
-                        </a:rPr>
-                        <m:t>1</m:t>
+                        <m:t>)=0,1</m:t>
                       </m:r>
                       <m:r>
                         <m:rPr>
@@ -9594,91 +9674,43 @@
                         <a:rPr lang="pt-BR" sz="2400">
                           <a:latin typeface="Cambria Math"/>
                         </a:rPr>
-                        <m:t>0</m:t>
+                        <m:t>0,5−</m:t>
                       </m:r>
                       <m:r>
                         <a:rPr lang="pt-BR" sz="2400">
                           <a:latin typeface="Cambria Math"/>
                         </a:rPr>
-                        <m:t>,</m:t>
+                        <m:t>𝑃</m:t>
                       </m:r>
                       <m:r>
                         <a:rPr lang="pt-BR" sz="2400">
                           <a:latin typeface="Cambria Math"/>
                         </a:rPr>
-                        <m:t>5</m:t>
+                        <m:t>(0≤</m:t>
                       </m:r>
                       <m:r>
                         <a:rPr lang="pt-BR" sz="2400">
                           <a:latin typeface="Cambria Math"/>
                         </a:rPr>
-                        <m:t>−</m:t>
+                        <m:t>𝑍</m:t>
                       </m:r>
                       <m:r>
                         <a:rPr lang="pt-BR" sz="2400">
                           <a:latin typeface="Cambria Math"/>
                         </a:rPr>
-                        <m:t>𝑃</m:t>
+                        <m:t>≤</m:t>
                       </m:r>
                       <m:r>
                         <a:rPr lang="pt-BR" sz="2400">
                           <a:latin typeface="Cambria Math"/>
                         </a:rPr>
-                        <m:t>(</m:t>
+                        <m:t>𝑧</m:t>
                       </m:r>
                       <m:r>
                         <a:rPr lang="pt-BR" sz="2400">
                           <a:latin typeface="Cambria Math"/>
                         </a:rPr>
-                        <m:t>0</m:t>
-                      </m:r>
-                      <m:r>
-                        <a:rPr lang="pt-BR" sz="2400">
-                          <a:latin typeface="Cambria Math"/>
-                        </a:rPr>
-                        <m:t>≤</m:t>
-                      </m:r>
-                      <m:r>
-                        <a:rPr lang="pt-BR" sz="2400">
-                          <a:latin typeface="Cambria Math"/>
-                        </a:rPr>
-                        <m:t>𝑍</m:t>
-                      </m:r>
-                      <m:r>
-                        <a:rPr lang="pt-BR" sz="2400">
-                          <a:latin typeface="Cambria Math"/>
-                        </a:rPr>
-                        <m:t>≤</m:t>
-                      </m:r>
-                      <m:r>
-                        <a:rPr lang="pt-BR" sz="2400">
-                          <a:latin typeface="Cambria Math"/>
-                        </a:rPr>
-                        <m:t>𝑧</m:t>
-                      </m:r>
-                      <m:r>
-                        <a:rPr lang="pt-BR" sz="2400">
-                          <a:latin typeface="Cambria Math"/>
-                        </a:rPr>
-                        <m:t>)=</m:t>
-                      </m:r>
-                      <m:r>
-                        <a:rPr lang="pt-BR" sz="2400">
-                          <a:latin typeface="Cambria Math"/>
-                        </a:rPr>
-                        <m:t>0</m:t>
-                      </m:r>
-                      <m:r>
-                        <a:rPr lang="pt-BR" sz="2400">
-                          <a:latin typeface="Cambria Math"/>
-                        </a:rPr>
-                        <m:t>,</m:t>
-                      </m:r>
-                      <m:r>
-                        <a:rPr lang="pt-BR" sz="2400">
-                          <a:latin typeface="Cambria Math"/>
-                        </a:rPr>
-                        <m:t>1</m:t>
+                        <m:t>)=0,1</m:t>
                       </m:r>
                     </m:oMath>
                   </m:oMathPara>
@@ -9722,13 +9754,13 @@
                         <a:rPr lang="pt-BR" sz="2400">
                           <a:latin typeface="Cambria Math"/>
                         </a:rPr>
-                        <m:t>(</m:t>
+                        <m:t>(0≤</m:t>
                       </m:r>
                       <m:r>
                         <a:rPr lang="pt-BR" sz="2400">
                           <a:latin typeface="Cambria Math"/>
                         </a:rPr>
-                        <m:t>0</m:t>
+                        <m:t>𝑍</m:t>
                       </m:r>
                       <m:r>
                         <a:rPr lang="pt-BR" sz="2400">
@@ -9740,43 +9772,13 @@
                         <a:rPr lang="pt-BR" sz="2400">
                           <a:latin typeface="Cambria Math"/>
                         </a:rPr>
-                        <m:t>𝑍</m:t>
+                        <m:t>𝑧</m:t>
                       </m:r>
                       <m:r>
                         <a:rPr lang="pt-BR" sz="2400">
                           <a:latin typeface="Cambria Math"/>
                         </a:rPr>
-                        <m:t>≤</m:t>
-                      </m:r>
-                      <m:r>
-                        <a:rPr lang="pt-BR" sz="2400">
-                          <a:latin typeface="Cambria Math"/>
-                        </a:rPr>
-                        <m:t>𝑧</m:t>
-                      </m:r>
-                      <m:r>
-                        <a:rPr lang="pt-BR" sz="2400">
-                          <a:latin typeface="Cambria Math"/>
-                        </a:rPr>
-                        <m:t>)=</m:t>
-                      </m:r>
-                      <m:r>
-                        <a:rPr lang="pt-BR" sz="2400">
-                          <a:latin typeface="Cambria Math"/>
-                        </a:rPr>
-                        <m:t>0</m:t>
-                      </m:r>
-                      <m:r>
-                        <a:rPr lang="pt-BR" sz="2400">
-                          <a:latin typeface="Cambria Math"/>
-                        </a:rPr>
-                        <m:t>,</m:t>
-                      </m:r>
-                      <m:r>
-                        <a:rPr lang="pt-BR" sz="2400">
-                          <a:latin typeface="Cambria Math"/>
-                        </a:rPr>
-                        <m:t>4</m:t>
+                        <m:t>)=0,4</m:t>
                       </m:r>
                       <m:r>
                         <m:rPr>
@@ -9812,25 +9814,7 @@
                         <a:rPr lang="pt-BR" sz="2400">
                           <a:latin typeface="Cambria Math"/>
                         </a:rPr>
-                        <m:t>≈</m:t>
-                      </m:r>
-                      <m:r>
-                        <a:rPr lang="pt-BR" sz="2400">
-                          <a:latin typeface="Cambria Math"/>
-                        </a:rPr>
-                        <m:t>1</m:t>
-                      </m:r>
-                      <m:r>
-                        <a:rPr lang="pt-BR" sz="2400">
-                          <a:latin typeface="Cambria Math"/>
-                        </a:rPr>
-                        <m:t>,</m:t>
-                      </m:r>
-                      <m:r>
-                        <a:rPr lang="pt-BR" sz="2400">
-                          <a:latin typeface="Cambria Math"/>
-                        </a:rPr>
-                        <m:t>28</m:t>
+                        <m:t>≈1,28</m:t>
                       </m:r>
                     </m:oMath>
                   </m:oMathPara>
@@ -10808,7 +10792,19 @@
                         <a:rPr lang="pt-BR" sz="2400" i="1" dirty="0" smtClean="0">
                           <a:latin typeface="Cambria Math" panose="02040503050406030204" pitchFamily="18" charset="0"/>
                         </a:rPr>
-                        <m:t> &lt;∞.</m:t>
+                        <m:t> &lt;</m:t>
+                      </m:r>
+                      <m:r>
+                        <a:rPr lang="pt-BR" sz="2400" i="1" dirty="0" smtClean="0">
+                          <a:latin typeface="Cambria Math" panose="02040503050406030204" pitchFamily="18" charset="0"/>
+                        </a:rPr>
+                        <m:t>∞</m:t>
+                      </m:r>
+                      <m:r>
+                        <a:rPr lang="pt-BR" sz="2400" i="1" dirty="0" smtClean="0">
+                          <a:latin typeface="Cambria Math" panose="02040503050406030204" pitchFamily="18" charset="0"/>
+                        </a:rPr>
+                        <m:t>.</m:t>
                       </m:r>
                     </m:oMath>
                   </m:oMathPara>
@@ -10845,19 +10841,37 @@
                       <a:rPr lang="pt-BR" sz="2400" i="1">
                         <a:latin typeface="Cambria Math" panose="02040503050406030204" pitchFamily="18" charset="0"/>
                       </a:rPr>
-                      <m:t>−∞&lt;</m:t>
+                      <m:t>−</m:t>
                     </m:r>
                     <m:r>
                       <a:rPr lang="pt-BR" sz="2400" i="1">
                         <a:latin typeface="Cambria Math" panose="02040503050406030204" pitchFamily="18" charset="0"/>
                       </a:rPr>
-                      <m:t>𝜇</m:t>
+                      <m:t>∞</m:t>
                     </m:r>
                     <m:r>
                       <a:rPr lang="pt-BR" sz="2400" i="1">
                         <a:latin typeface="Cambria Math" panose="02040503050406030204" pitchFamily="18" charset="0"/>
                       </a:rPr>
-                      <m:t>&lt;+∞</m:t>
+                      <m:t>&lt;</m:t>
+                    </m:r>
+                    <m:r>
+                      <a:rPr lang="pt-BR" sz="2400" i="1">
+                        <a:latin typeface="Cambria Math" panose="02040503050406030204" pitchFamily="18" charset="0"/>
+                      </a:rPr>
+                      <m:t>𝜇</m:t>
+                    </m:r>
+                    <m:r>
+                      <a:rPr lang="pt-BR" sz="2400" i="1">
+                        <a:latin typeface="Cambria Math" panose="02040503050406030204" pitchFamily="18" charset="0"/>
+                      </a:rPr>
+                      <m:t>&lt;+</m:t>
+                    </m:r>
+                    <m:r>
+                      <a:rPr lang="pt-BR" sz="2400" i="1">
+                        <a:latin typeface="Cambria Math" panose="02040503050406030204" pitchFamily="18" charset="0"/>
+                      </a:rPr>
+                      <m:t>∞</m:t>
                     </m:r>
                   </m:oMath>
                 </a14:m>
@@ -10883,7 +10897,13 @@
                       <a:rPr lang="pt-BR" sz="2400" i="1" dirty="0" smtClean="0">
                         <a:latin typeface="Cambria Math" panose="02040503050406030204" pitchFamily="18" charset="0"/>
                       </a:rPr>
-                      <m:t>0&lt; </m:t>
+                      <m:t>0</m:t>
+                    </m:r>
+                    <m:r>
+                      <a:rPr lang="pt-BR" sz="2400" i="1" dirty="0" smtClean="0">
+                        <a:latin typeface="Cambria Math" panose="02040503050406030204" pitchFamily="18" charset="0"/>
+                      </a:rPr>
+                      <m:t>&lt; </m:t>
                     </m:r>
                     <m:sSup>
                       <m:sSupPr>
@@ -10920,7 +10940,13 @@
                       <a:rPr lang="pt-BR" sz="2400" b="0" i="1" dirty="0" smtClean="0">
                         <a:latin typeface="Cambria Math" panose="02040503050406030204" pitchFamily="18" charset="0"/>
                       </a:rPr>
-                      <m:t>∞.</m:t>
+                      <m:t>∞</m:t>
+                    </m:r>
+                    <m:r>
+                      <a:rPr lang="pt-BR" sz="2400" b="0" i="1" dirty="0" smtClean="0">
+                        <a:latin typeface="Cambria Math" panose="02040503050406030204" pitchFamily="18" charset="0"/>
+                      </a:rPr>
+                      <m:t>.</m:t>
                     </m:r>
                   </m:oMath>
                 </a14:m>
@@ -11135,19 +11161,7 @@
                       <a:rPr lang="pt-BR" sz="2400">
                         <a:latin typeface="Cambria Math"/>
                       </a:rPr>
-                      <m:t>(</m:t>
-                    </m:r>
-                    <m:r>
-                      <a:rPr lang="pt-BR" sz="2400">
-                        <a:latin typeface="Cambria Math"/>
-                      </a:rPr>
-                      <m:t>0</m:t>
-                    </m:r>
-                    <m:r>
-                      <a:rPr lang="pt-BR" sz="2400">
-                        <a:latin typeface="Cambria Math"/>
-                      </a:rPr>
-                      <m:t>≤</m:t>
+                      <m:t>(0≤</m:t>
                     </m:r>
                     <m:r>
                       <a:rPr lang="pt-BR" sz="2400">
@@ -11159,37 +11173,7 @@
                       <a:rPr lang="pt-BR" sz="2400">
                         <a:latin typeface="Cambria Math"/>
                       </a:rPr>
-                      <m:t>≤</m:t>
-                    </m:r>
-                    <m:r>
-                      <a:rPr lang="pt-BR" sz="2400">
-                        <a:latin typeface="Cambria Math"/>
-                      </a:rPr>
-                      <m:t>2</m:t>
-                    </m:r>
-                    <m:r>
-                      <a:rPr lang="pt-BR" sz="2400">
-                        <a:latin typeface="Cambria Math"/>
-                      </a:rPr>
-                      <m:t>)=</m:t>
-                    </m:r>
-                    <m:r>
-                      <a:rPr lang="pt-BR" sz="2400">
-                        <a:latin typeface="Cambria Math"/>
-                      </a:rPr>
-                      <m:t>0</m:t>
-                    </m:r>
-                    <m:r>
-                      <a:rPr lang="pt-BR" sz="2400">
-                        <a:latin typeface="Cambria Math"/>
-                      </a:rPr>
-                      <m:t>,</m:t>
-                    </m:r>
-                    <m:r>
-                      <a:rPr lang="pt-BR" sz="2400">
-                        <a:latin typeface="Cambria Math"/>
-                      </a:rPr>
-                      <m:t>4772</m:t>
+                      <m:t>≤2)=0,4772</m:t>
                     </m:r>
                   </m:oMath>
                 </a14:m>
@@ -11209,19 +11193,7 @@
                       <a:rPr lang="pt-BR" sz="2400">
                         <a:latin typeface="Cambria Math"/>
                       </a:rPr>
-                      <m:t>(</m:t>
-                    </m:r>
-                    <m:r>
-                      <a:rPr lang="pt-BR" sz="2400">
-                        <a:latin typeface="Cambria Math"/>
-                      </a:rPr>
-                      <m:t>0</m:t>
-                    </m:r>
-                    <m:r>
-                      <a:rPr lang="pt-BR" sz="2400">
-                        <a:latin typeface="Cambria Math"/>
-                      </a:rPr>
-                      <m:t>≤</m:t>
+                      <m:t>(0≤</m:t>
                     </m:r>
                     <m:r>
                       <a:rPr lang="pt-BR" sz="2400">
@@ -11233,37 +11205,7 @@
                       <a:rPr lang="pt-BR" sz="2400">
                         <a:latin typeface="Cambria Math"/>
                       </a:rPr>
-                      <m:t>≤</m:t>
-                    </m:r>
-                    <m:r>
-                      <a:rPr lang="pt-BR" sz="2400">
-                        <a:latin typeface="Cambria Math"/>
-                      </a:rPr>
-                      <m:t>1</m:t>
-                    </m:r>
-                    <m:r>
-                      <a:rPr lang="pt-BR" sz="2400">
-                        <a:latin typeface="Cambria Math"/>
-                      </a:rPr>
-                      <m:t>)=</m:t>
-                    </m:r>
-                    <m:r>
-                      <a:rPr lang="pt-BR" sz="2400">
-                        <a:latin typeface="Cambria Math"/>
-                      </a:rPr>
-                      <m:t>0</m:t>
-                    </m:r>
-                    <m:r>
-                      <a:rPr lang="pt-BR" sz="2400">
-                        <a:latin typeface="Cambria Math"/>
-                      </a:rPr>
-                      <m:t>,</m:t>
-                    </m:r>
-                    <m:r>
-                      <a:rPr lang="pt-BR" sz="2400">
-                        <a:latin typeface="Cambria Math"/>
-                      </a:rPr>
-                      <m:t>3413</m:t>
+                      <m:t>≤1)=0,3413</m:t>
                     </m:r>
                   </m:oMath>
                 </a14:m>
@@ -11324,43 +11266,7 @@
                       <a:rPr lang="pt-BR" sz="2400">
                         <a:latin typeface="Cambria Math"/>
                       </a:rPr>
-                      <m:t>&gt;</m:t>
-                    </m:r>
-                    <m:r>
-                      <a:rPr lang="pt-BR" sz="2400">
-                        <a:latin typeface="Cambria Math"/>
-                      </a:rPr>
-                      <m:t>2</m:t>
-                    </m:r>
-                    <m:r>
-                      <a:rPr lang="pt-BR" sz="2400">
-                        <a:latin typeface="Cambria Math"/>
-                      </a:rPr>
-                      <m:t>)=</m:t>
-                    </m:r>
-                    <m:r>
-                      <a:rPr lang="pt-BR" sz="2400">
-                        <a:latin typeface="Cambria Math"/>
-                      </a:rPr>
-                      <m:t>0</m:t>
-                    </m:r>
-                    <m:r>
-                      <a:rPr lang="pt-BR" sz="2400">
-                        <a:latin typeface="Cambria Math"/>
-                      </a:rPr>
-                      <m:t>,</m:t>
-                    </m:r>
-                    <m:r>
-                      <a:rPr lang="pt-BR" sz="2400">
-                        <a:latin typeface="Cambria Math"/>
-                      </a:rPr>
-                      <m:t>5</m:t>
-                    </m:r>
-                    <m:r>
-                      <a:rPr lang="pt-BR" sz="2400">
-                        <a:latin typeface="Cambria Math"/>
-                      </a:rPr>
-                      <m:t>−</m:t>
+                      <m:t>&gt;2)=0,5−</m:t>
                     </m:r>
                     <m:r>
                       <a:rPr lang="pt-BR" sz="2400">
@@ -11372,19 +11278,7 @@
                       <a:rPr lang="pt-BR" sz="2400">
                         <a:latin typeface="Cambria Math"/>
                       </a:rPr>
-                      <m:t>(</m:t>
-                    </m:r>
-                    <m:r>
-                      <a:rPr lang="pt-BR" sz="2400">
-                        <a:latin typeface="Cambria Math"/>
-                      </a:rPr>
-                      <m:t>0</m:t>
-                    </m:r>
-                    <m:r>
-                      <a:rPr lang="pt-BR" sz="2400">
-                        <a:latin typeface="Cambria Math"/>
-                      </a:rPr>
-                      <m:t>≤</m:t>
+                      <m:t>(0≤</m:t>
                     </m:r>
                     <m:r>
                       <a:rPr lang="pt-BR" sz="2400">
@@ -11396,85 +11290,7 @@
                       <a:rPr lang="pt-BR" sz="2400">
                         <a:latin typeface="Cambria Math"/>
                       </a:rPr>
-                      <m:t>≤</m:t>
-                    </m:r>
-                    <m:r>
-                      <a:rPr lang="pt-BR" sz="2400">
-                        <a:latin typeface="Cambria Math"/>
-                      </a:rPr>
-                      <m:t>2</m:t>
-                    </m:r>
-                    <m:r>
-                      <a:rPr lang="pt-BR" sz="2400">
-                        <a:latin typeface="Cambria Math"/>
-                      </a:rPr>
-                      <m:t>)=</m:t>
-                    </m:r>
-                    <m:r>
-                      <a:rPr lang="pt-BR" sz="2400">
-                        <a:latin typeface="Cambria Math"/>
-                      </a:rPr>
-                      <m:t>0</m:t>
-                    </m:r>
-                    <m:r>
-                      <a:rPr lang="pt-BR" sz="2400">
-                        <a:latin typeface="Cambria Math"/>
-                      </a:rPr>
-                      <m:t>,</m:t>
-                    </m:r>
-                    <m:r>
-                      <a:rPr lang="pt-BR" sz="2400">
-                        <a:latin typeface="Cambria Math"/>
-                      </a:rPr>
-                      <m:t>5</m:t>
-                    </m:r>
-                    <m:r>
-                      <a:rPr lang="pt-BR" sz="2400">
-                        <a:latin typeface="Cambria Math"/>
-                      </a:rPr>
-                      <m:t>−</m:t>
-                    </m:r>
-                    <m:r>
-                      <a:rPr lang="pt-BR" sz="2400">
-                        <a:latin typeface="Cambria Math"/>
-                      </a:rPr>
-                      <m:t>0</m:t>
-                    </m:r>
-                    <m:r>
-                      <a:rPr lang="pt-BR" sz="2400">
-                        <a:latin typeface="Cambria Math"/>
-                      </a:rPr>
-                      <m:t>,</m:t>
-                    </m:r>
-                    <m:r>
-                      <a:rPr lang="pt-BR" sz="2400">
-                        <a:latin typeface="Cambria Math"/>
-                      </a:rPr>
-                      <m:t>4772</m:t>
-                    </m:r>
-                    <m:r>
-                      <a:rPr lang="pt-BR" sz="2400">
-                        <a:latin typeface="Cambria Math"/>
-                      </a:rPr>
-                      <m:t>=</m:t>
-                    </m:r>
-                    <m:r>
-                      <a:rPr lang="pt-BR" sz="2400">
-                        <a:latin typeface="Cambria Math"/>
-                      </a:rPr>
-                      <m:t>0</m:t>
-                    </m:r>
-                    <m:r>
-                      <a:rPr lang="pt-BR" sz="2400">
-                        <a:latin typeface="Cambria Math"/>
-                      </a:rPr>
-                      <m:t>,</m:t>
-                    </m:r>
-                    <m:r>
-                      <a:rPr lang="pt-BR" sz="2400">
-                        <a:latin typeface="Cambria Math"/>
-                      </a:rPr>
-                      <m:t>0228</m:t>
+                      <m:t>≤2)=0,5−0,4772=0,0228</m:t>
                     </m:r>
                   </m:oMath>
                 </a14:m>
@@ -11540,19 +11356,7 @@
                       <a:rPr lang="pt-BR" sz="2400">
                         <a:latin typeface="Cambria Math"/>
                       </a:rPr>
-                      <m:t>(−</m:t>
-                    </m:r>
-                    <m:r>
-                      <a:rPr lang="pt-BR" sz="2400">
-                        <a:latin typeface="Cambria Math"/>
-                      </a:rPr>
-                      <m:t>1</m:t>
-                    </m:r>
-                    <m:r>
-                      <a:rPr lang="pt-BR" sz="2400">
-                        <a:latin typeface="Cambria Math"/>
-                      </a:rPr>
-                      <m:t>≤</m:t>
+                      <m:t>(−1≤</m:t>
                     </m:r>
                     <m:r>
                       <a:rPr lang="pt-BR" sz="2400">
@@ -11564,31 +11368,7 @@
                       <a:rPr lang="pt-BR" sz="2400">
                         <a:latin typeface="Cambria Math"/>
                       </a:rPr>
-                      <m:t>≤</m:t>
-                    </m:r>
-                    <m:r>
-                      <a:rPr lang="pt-BR" sz="2400">
-                        <a:latin typeface="Cambria Math"/>
-                      </a:rPr>
-                      <m:t>1</m:t>
-                    </m:r>
-                    <m:r>
-                      <a:rPr lang="pt-BR" sz="2400">
-                        <a:latin typeface="Cambria Math"/>
-                      </a:rPr>
-                      <m:t>)=</m:t>
-                    </m:r>
-                    <m:r>
-                      <a:rPr lang="pt-BR" sz="2400">
-                        <a:latin typeface="Cambria Math"/>
-                      </a:rPr>
-                      <m:t>2</m:t>
-                    </m:r>
-                    <m:r>
-                      <a:rPr lang="pt-BR" sz="2400">
-                        <a:latin typeface="Cambria Math"/>
-                      </a:rPr>
-                      <m:t>·</m:t>
+                      <m:t>≤1)=2·</m:t>
                     </m:r>
                     <m:r>
                       <a:rPr lang="pt-BR" sz="2400">
@@ -11600,19 +11380,7 @@
                       <a:rPr lang="pt-BR" sz="2400">
                         <a:latin typeface="Cambria Math"/>
                       </a:rPr>
-                      <m:t>(</m:t>
-                    </m:r>
-                    <m:r>
-                      <a:rPr lang="pt-BR" sz="2400">
-                        <a:latin typeface="Cambria Math"/>
-                      </a:rPr>
-                      <m:t>0</m:t>
-                    </m:r>
-                    <m:r>
-                      <a:rPr lang="pt-BR" sz="2400">
-                        <a:latin typeface="Cambria Math"/>
-                      </a:rPr>
-                      <m:t>≤</m:t>
+                      <m:t>(0≤</m:t>
                     </m:r>
                     <m:r>
                       <a:rPr lang="pt-BR" sz="2400">
@@ -11624,73 +11392,7 @@
                       <a:rPr lang="pt-BR" sz="2400">
                         <a:latin typeface="Cambria Math"/>
                       </a:rPr>
-                      <m:t>≤</m:t>
-                    </m:r>
-                    <m:r>
-                      <a:rPr lang="pt-BR" sz="2400">
-                        <a:latin typeface="Cambria Math"/>
-                      </a:rPr>
-                      <m:t>1</m:t>
-                    </m:r>
-                    <m:r>
-                      <a:rPr lang="pt-BR" sz="2400">
-                        <a:latin typeface="Cambria Math"/>
-                      </a:rPr>
-                      <m:t>)=</m:t>
-                    </m:r>
-                    <m:r>
-                      <a:rPr lang="pt-BR" sz="2400">
-                        <a:latin typeface="Cambria Math"/>
-                      </a:rPr>
-                      <m:t>2</m:t>
-                    </m:r>
-                    <m:r>
-                      <a:rPr lang="pt-BR" sz="2400">
-                        <a:latin typeface="Cambria Math"/>
-                      </a:rPr>
-                      <m:t>(</m:t>
-                    </m:r>
-                    <m:r>
-                      <a:rPr lang="pt-BR" sz="2400">
-                        <a:latin typeface="Cambria Math"/>
-                      </a:rPr>
-                      <m:t>0</m:t>
-                    </m:r>
-                    <m:r>
-                      <a:rPr lang="pt-BR" sz="2400">
-                        <a:latin typeface="Cambria Math"/>
-                      </a:rPr>
-                      <m:t>,</m:t>
-                    </m:r>
-                    <m:r>
-                      <a:rPr lang="pt-BR" sz="2400">
-                        <a:latin typeface="Cambria Math"/>
-                      </a:rPr>
-                      <m:t>3413</m:t>
-                    </m:r>
-                    <m:r>
-                      <a:rPr lang="pt-BR" sz="2400">
-                        <a:latin typeface="Cambria Math"/>
-                      </a:rPr>
-                      <m:t>)=</m:t>
-                    </m:r>
-                    <m:r>
-                      <a:rPr lang="pt-BR" sz="2400">
-                        <a:latin typeface="Cambria Math"/>
-                      </a:rPr>
-                      <m:t>0</m:t>
-                    </m:r>
-                    <m:r>
-                      <a:rPr lang="pt-BR" sz="2400">
-                        <a:latin typeface="Cambria Math"/>
-                      </a:rPr>
-                      <m:t>,</m:t>
-                    </m:r>
-                    <m:r>
-                      <a:rPr lang="pt-BR" sz="2400">
-                        <a:latin typeface="Cambria Math"/>
-                      </a:rPr>
-                      <m:t>6826</m:t>
+                      <m:t>≤1)=2(0,3413)=0,6826</m:t>
                     </m:r>
                   </m:oMath>
                 </a14:m>
@@ -12006,7 +11708,19 @@
                           <a:rPr lang="pt-BR" sz="2400" b="0" i="1" smtClean="0">
                             <a:latin typeface="Cambria Math" panose="02040503050406030204" pitchFamily="18" charset="0"/>
                           </a:rPr>
-                          <m:t>0,1</m:t>
+                          <m:t>0</m:t>
+                        </m:r>
+                        <m:r>
+                          <a:rPr lang="pt-BR" sz="2400" b="0" i="1" smtClean="0">
+                            <a:latin typeface="Cambria Math" panose="02040503050406030204" pitchFamily="18" charset="0"/>
+                          </a:rPr>
+                          <m:t>,</m:t>
+                        </m:r>
+                        <m:r>
+                          <a:rPr lang="pt-BR" sz="2400" b="0" i="1" smtClean="0">
+                            <a:latin typeface="Cambria Math" panose="02040503050406030204" pitchFamily="18" charset="0"/>
+                          </a:rPr>
+                          <m:t>1</m:t>
                         </m:r>
                       </m:e>
                     </m:d>
@@ -12322,7 +12036,13 @@
                           <a:rPr lang="pt-BR" sz="2400" b="0" i="1" smtClean="0">
                             <a:latin typeface="Cambria Math" panose="02040503050406030204" pitchFamily="18" charset="0"/>
                           </a:rPr>
-                          <m:t>100≤</m:t>
+                          <m:t>100</m:t>
+                        </m:r>
+                        <m:r>
+                          <a:rPr lang="pt-BR" sz="2400" b="0" i="1" smtClean="0">
+                            <a:latin typeface="Cambria Math" panose="02040503050406030204" pitchFamily="18" charset="0"/>
+                          </a:rPr>
+                          <m:t>≤</m:t>
                         </m:r>
                         <m:r>
                           <a:rPr lang="pt-BR" sz="2400" b="0" i="1" smtClean="0">
@@ -12334,7 +12054,13 @@
                           <a:rPr lang="pt-BR" sz="2400" b="0" i="1" smtClean="0">
                             <a:latin typeface="Cambria Math" panose="02040503050406030204" pitchFamily="18" charset="0"/>
                           </a:rPr>
-                          <m:t>≤106</m:t>
+                          <m:t>≤</m:t>
+                        </m:r>
+                        <m:r>
+                          <a:rPr lang="pt-BR" sz="2400" b="0" i="1" smtClean="0">
+                            <a:latin typeface="Cambria Math" panose="02040503050406030204" pitchFamily="18" charset="0"/>
+                          </a:rPr>
+                          <m:t>106</m:t>
                         </m:r>
                       </m:e>
                     </m:d>
@@ -12397,7 +12123,13 @@
                           <a:rPr lang="pt-BR" sz="2400" i="1">
                             <a:latin typeface="Cambria Math" panose="02040503050406030204" pitchFamily="18" charset="0"/>
                           </a:rPr>
-                          <m:t>≤107</m:t>
+                          <m:t>≤</m:t>
+                        </m:r>
+                        <m:r>
+                          <a:rPr lang="pt-BR" sz="2400" i="1">
+                            <a:latin typeface="Cambria Math" panose="02040503050406030204" pitchFamily="18" charset="0"/>
+                          </a:rPr>
+                          <m:t>107</m:t>
                         </m:r>
                       </m:e>
                     </m:d>
@@ -12448,7 +12180,13 @@
                           <a:rPr lang="pt-BR" sz="2400" b="0" i="1" smtClean="0">
                             <a:latin typeface="Cambria Math" panose="02040503050406030204" pitchFamily="18" charset="0"/>
                           </a:rPr>
-                          <m:t>≤90</m:t>
+                          <m:t>≤</m:t>
+                        </m:r>
+                        <m:r>
+                          <a:rPr lang="pt-BR" sz="2400" b="0" i="1" smtClean="0">
+                            <a:latin typeface="Cambria Math" panose="02040503050406030204" pitchFamily="18" charset="0"/>
+                          </a:rPr>
+                          <m:t>90</m:t>
                         </m:r>
                       </m:e>
                     </m:d>
@@ -12499,7 +12237,13 @@
                           <a:rPr lang="pt-BR" sz="2400" b="0" i="1" smtClean="0">
                             <a:latin typeface="Cambria Math" panose="02040503050406030204" pitchFamily="18" charset="0"/>
                           </a:rPr>
-                          <m:t>≥108</m:t>
+                          <m:t>≥</m:t>
+                        </m:r>
+                        <m:r>
+                          <a:rPr lang="pt-BR" sz="2400" b="0" i="1" smtClean="0">
+                            <a:latin typeface="Cambria Math" panose="02040503050406030204" pitchFamily="18" charset="0"/>
+                          </a:rPr>
+                          <m:t>108</m:t>
                         </m:r>
                       </m:e>
                     </m:d>
@@ -12655,8 +12399,8 @@
           </a:p>
         </p:txBody>
       </p:sp>
-      <mc:AlternateContent xmlns:mc="http://schemas.openxmlformats.org/markup-compatibility/2006">
-        <mc:Choice xmlns:a14="http://schemas.microsoft.com/office/drawing/2010/main" Requires="a14">
+      <mc:AlternateContent xmlns:mc="http://schemas.openxmlformats.org/markup-compatibility/2006" xmlns:a14="http://schemas.microsoft.com/office/drawing/2010/main">
+        <mc:Choice Requires="a14">
           <p:sp>
             <p:nvSpPr>
               <p:cNvPr id="4" name="TextBox 3"/>
@@ -12870,7 +12614,7 @@
             </p:txBody>
           </p:sp>
         </mc:Choice>
-        <mc:Fallback>
+        <mc:Fallback xmlns="">
           <p:sp>
             <p:nvSpPr>
               <p:cNvPr id="4" name="TextBox 3"/>
@@ -15266,13 +15010,7 @@
                           <a:rPr lang="pt-BR" sz="2400" i="1">
                             <a:latin typeface="Cambria Math" panose="02040503050406030204" pitchFamily="18" charset="0"/>
                           </a:rPr>
-                          <m:t>3</m:t>
-                        </m:r>
-                        <m:r>
-                          <a:rPr lang="pt-BR" sz="2400" i="1">
-                            <a:latin typeface="Cambria Math" panose="02040503050406030204" pitchFamily="18" charset="0"/>
-                          </a:rPr>
-                          <m:t>,</m:t>
+                          <m:t>3,</m:t>
                         </m:r>
                         <m:sSup>
                           <m:sSupPr>
@@ -15303,13 +15041,7 @@
                           <a:rPr lang="pt-BR" sz="2400" i="1">
                             <a:latin typeface="Cambria Math" panose="02040503050406030204" pitchFamily="18" charset="0"/>
                           </a:rPr>
-                          <m:t>=</m:t>
-                        </m:r>
-                        <m:r>
-                          <a:rPr lang="pt-BR" sz="2400" i="1">
-                            <a:latin typeface="Cambria Math" panose="02040503050406030204" pitchFamily="18" charset="0"/>
-                          </a:rPr>
-                          <m:t>4</m:t>
+                          <m:t>=4</m:t>
                         </m:r>
                       </m:e>
                     </m:d>
@@ -15337,43 +15069,19 @@
                       <a:rPr lang="pt-BR" sz="2400" b="0" i="1" smtClean="0">
                         <a:latin typeface="Cambria Math" panose="02040503050406030204" pitchFamily="18" charset="0"/>
                       </a:rPr>
-                      <m:t>(</m:t>
+                      <m:t>(2≤</m:t>
                     </m:r>
                     <m:r>
                       <a:rPr lang="pt-BR" sz="2400" b="0" i="1" smtClean="0">
                         <a:latin typeface="Cambria Math" panose="02040503050406030204" pitchFamily="18" charset="0"/>
                       </a:rPr>
-                      <m:t>2</m:t>
+                      <m:t>𝑋</m:t>
                     </m:r>
                     <m:r>
                       <a:rPr lang="pt-BR" sz="2400" b="0" i="1" smtClean="0">
                         <a:latin typeface="Cambria Math" panose="02040503050406030204" pitchFamily="18" charset="0"/>
                       </a:rPr>
-                      <m:t>≤</m:t>
-                    </m:r>
-                    <m:r>
-                      <a:rPr lang="pt-BR" sz="2400" b="0" i="1" smtClean="0">
-                        <a:latin typeface="Cambria Math" panose="02040503050406030204" pitchFamily="18" charset="0"/>
-                      </a:rPr>
-                      <m:t>𝑋</m:t>
-                    </m:r>
-                    <m:r>
-                      <a:rPr lang="pt-BR" sz="2400" b="0" i="1" smtClean="0">
-                        <a:latin typeface="Cambria Math" panose="02040503050406030204" pitchFamily="18" charset="0"/>
-                      </a:rPr>
-                      <m:t>≤</m:t>
-                    </m:r>
-                    <m:r>
-                      <a:rPr lang="pt-BR" sz="2400" b="0" i="1" smtClean="0">
-                        <a:latin typeface="Cambria Math" panose="02040503050406030204" pitchFamily="18" charset="0"/>
-                      </a:rPr>
-                      <m:t>4</m:t>
-                    </m:r>
-                    <m:r>
-                      <a:rPr lang="pt-BR" sz="2400" b="0" i="1" smtClean="0">
-                        <a:latin typeface="Cambria Math" panose="02040503050406030204" pitchFamily="18" charset="0"/>
-                      </a:rPr>
-                      <m:t>)</m:t>
+                      <m:t>≤4)</m:t>
                     </m:r>
                   </m:oMath>
                 </a14:m>
@@ -17155,19 +16863,7 @@
                       <a:rPr lang="pt-BR" sz="2400">
                         <a:latin typeface="Cambria Math"/>
                       </a:rPr>
-                      <m:t>(</m:t>
-                    </m:r>
-                    <m:r>
-                      <a:rPr lang="pt-BR" sz="2400">
-                        <a:latin typeface="Cambria Math"/>
-                      </a:rPr>
-                      <m:t>60</m:t>
-                    </m:r>
-                    <m:r>
-                      <a:rPr lang="pt-BR" sz="2400">
-                        <a:latin typeface="Cambria Math"/>
-                      </a:rPr>
-                      <m:t>,</m:t>
+                      <m:t>(60,</m:t>
                     </m:r>
                     <m:r>
                       <m:rPr>
@@ -17659,7 +17355,13 @@
                           <a:rPr lang="pt-BR" sz="2400">
                             <a:latin typeface="Cambria Math"/>
                           </a:rPr>
-                          <m:t>−60</m:t>
+                          <m:t>−</m:t>
+                        </m:r>
+                        <m:r>
+                          <a:rPr lang="pt-BR" sz="2400">
+                            <a:latin typeface="Cambria Math"/>
+                          </a:rPr>
+                          <m:t>60</m:t>
                         </m:r>
                       </m:num>
                       <m:den>
@@ -17717,7 +17419,19 @@
                       <a:rPr lang="pt-BR" sz="2400">
                         <a:latin typeface="Cambria Math"/>
                       </a:rPr>
-                      <m:t>&gt;75)=</m:t>
+                      <m:t>&gt;</m:t>
+                    </m:r>
+                    <m:r>
+                      <a:rPr lang="pt-BR" sz="2400">
+                        <a:latin typeface="Cambria Math"/>
+                      </a:rPr>
+                      <m:t>75</m:t>
+                    </m:r>
+                    <m:r>
+                      <a:rPr lang="pt-BR" sz="2400">
+                        <a:latin typeface="Cambria Math"/>
+                      </a:rPr>
+                      <m:t>)=</m:t>
                     </m:r>
                     <m:r>
                       <a:rPr lang="pt-BR" sz="2400">
@@ -17741,7 +17455,55 @@
                       <a:rPr lang="pt-BR" sz="2400">
                         <a:latin typeface="Cambria Math"/>
                       </a:rPr>
-                      <m:t>&gt;1,5)=0,5−</m:t>
+                      <m:t>&gt;</m:t>
+                    </m:r>
+                    <m:r>
+                      <a:rPr lang="pt-BR" sz="2400">
+                        <a:latin typeface="Cambria Math"/>
+                      </a:rPr>
+                      <m:t>1</m:t>
+                    </m:r>
+                    <m:r>
+                      <a:rPr lang="pt-BR" sz="2400">
+                        <a:latin typeface="Cambria Math"/>
+                      </a:rPr>
+                      <m:t>,</m:t>
+                    </m:r>
+                    <m:r>
+                      <a:rPr lang="pt-BR" sz="2400">
+                        <a:latin typeface="Cambria Math"/>
+                      </a:rPr>
+                      <m:t>5</m:t>
+                    </m:r>
+                    <m:r>
+                      <a:rPr lang="pt-BR" sz="2400">
+                        <a:latin typeface="Cambria Math"/>
+                      </a:rPr>
+                      <m:t>)=</m:t>
+                    </m:r>
+                    <m:r>
+                      <a:rPr lang="pt-BR" sz="2400">
+                        <a:latin typeface="Cambria Math"/>
+                      </a:rPr>
+                      <m:t>0</m:t>
+                    </m:r>
+                    <m:r>
+                      <a:rPr lang="pt-BR" sz="2400">
+                        <a:latin typeface="Cambria Math"/>
+                      </a:rPr>
+                      <m:t>,</m:t>
+                    </m:r>
+                    <m:r>
+                      <a:rPr lang="pt-BR" sz="2400">
+                        <a:latin typeface="Cambria Math"/>
+                      </a:rPr>
+                      <m:t>5</m:t>
+                    </m:r>
+                    <m:r>
+                      <a:rPr lang="pt-BR" sz="2400">
+                        <a:latin typeface="Cambria Math"/>
+                      </a:rPr>
+                      <m:t>−</m:t>
                     </m:r>
                     <m:r>
                       <a:rPr lang="pt-BR" sz="2400">
@@ -17753,7 +17515,19 @@
                       <a:rPr lang="pt-BR" sz="2400">
                         <a:latin typeface="Cambria Math"/>
                       </a:rPr>
-                      <m:t>(0≤</m:t>
+                      <m:t>(</m:t>
+                    </m:r>
+                    <m:r>
+                      <a:rPr lang="pt-BR" sz="2400">
+                        <a:latin typeface="Cambria Math"/>
+                      </a:rPr>
+                      <m:t>0</m:t>
+                    </m:r>
+                    <m:r>
+                      <a:rPr lang="pt-BR" sz="2400">
+                        <a:latin typeface="Cambria Math"/>
+                      </a:rPr>
+                      <m:t>≤</m:t>
                     </m:r>
                     <m:r>
                       <a:rPr lang="pt-BR" sz="2400">
@@ -17765,7 +17539,31 @@
                       <a:rPr lang="pt-BR" sz="2400">
                         <a:latin typeface="Cambria Math"/>
                       </a:rPr>
-                      <m:t>≤1,5)</m:t>
+                      <m:t>≤</m:t>
+                    </m:r>
+                    <m:r>
+                      <a:rPr lang="pt-BR" sz="2400">
+                        <a:latin typeface="Cambria Math"/>
+                      </a:rPr>
+                      <m:t>1</m:t>
+                    </m:r>
+                    <m:r>
+                      <a:rPr lang="pt-BR" sz="2400">
+                        <a:latin typeface="Cambria Math"/>
+                      </a:rPr>
+                      <m:t>,</m:t>
+                    </m:r>
+                    <m:r>
+                      <a:rPr lang="pt-BR" sz="2400">
+                        <a:latin typeface="Cambria Math"/>
+                      </a:rPr>
+                      <m:t>5</m:t>
+                    </m:r>
+                    <m:r>
+                      <a:rPr lang="pt-BR" sz="2400">
+                        <a:latin typeface="Cambria Math"/>
+                      </a:rPr>
+                      <m:t>)</m:t>
                     </m:r>
                   </m:oMath>
                 </a14:m>
@@ -17787,7 +17585,73 @@
                         <a:rPr lang="pt-BR" sz="2400">
                           <a:latin typeface="Cambria Math"/>
                         </a:rPr>
-                        <m:t>=0,5−0,4332=0,0668</m:t>
+                        <m:t>=</m:t>
+                      </m:r>
+                      <m:r>
+                        <a:rPr lang="pt-BR" sz="2400">
+                          <a:latin typeface="Cambria Math"/>
+                        </a:rPr>
+                        <m:t>0</m:t>
+                      </m:r>
+                      <m:r>
+                        <a:rPr lang="pt-BR" sz="2400">
+                          <a:latin typeface="Cambria Math"/>
+                        </a:rPr>
+                        <m:t>,</m:t>
+                      </m:r>
+                      <m:r>
+                        <a:rPr lang="pt-BR" sz="2400">
+                          <a:latin typeface="Cambria Math"/>
+                        </a:rPr>
+                        <m:t>5</m:t>
+                      </m:r>
+                      <m:r>
+                        <a:rPr lang="pt-BR" sz="2400">
+                          <a:latin typeface="Cambria Math"/>
+                        </a:rPr>
+                        <m:t>−</m:t>
+                      </m:r>
+                      <m:r>
+                        <a:rPr lang="pt-BR" sz="2400">
+                          <a:latin typeface="Cambria Math"/>
+                        </a:rPr>
+                        <m:t>0</m:t>
+                      </m:r>
+                      <m:r>
+                        <a:rPr lang="pt-BR" sz="2400">
+                          <a:latin typeface="Cambria Math"/>
+                        </a:rPr>
+                        <m:t>,</m:t>
+                      </m:r>
+                      <m:r>
+                        <a:rPr lang="pt-BR" sz="2400">
+                          <a:latin typeface="Cambria Math"/>
+                        </a:rPr>
+                        <m:t>4332</m:t>
+                      </m:r>
+                      <m:r>
+                        <a:rPr lang="pt-BR" sz="2400">
+                          <a:latin typeface="Cambria Math"/>
+                        </a:rPr>
+                        <m:t>=</m:t>
+                      </m:r>
+                      <m:r>
+                        <a:rPr lang="pt-BR" sz="2400">
+                          <a:latin typeface="Cambria Math"/>
+                        </a:rPr>
+                        <m:t>0</m:t>
+                      </m:r>
+                      <m:r>
+                        <a:rPr lang="pt-BR" sz="2400">
+                          <a:latin typeface="Cambria Math"/>
+                        </a:rPr>
+                        <m:t>,</m:t>
+                      </m:r>
+                      <m:r>
+                        <a:rPr lang="pt-BR" sz="2400">
+                          <a:latin typeface="Cambria Math"/>
+                        </a:rPr>
+                        <m:t>0668</m:t>
                       </m:r>
                     </m:oMath>
                   </m:oMathPara>
@@ -17833,7 +17697,19 @@
                       <a:rPr lang="pt-BR" sz="2400">
                         <a:latin typeface="Cambria Math"/>
                       </a:rPr>
-                      <m:t>≤50)=</m:t>
+                      <m:t>≤</m:t>
+                    </m:r>
+                    <m:r>
+                      <a:rPr lang="pt-BR" sz="2400">
+                        <a:latin typeface="Cambria Math"/>
+                      </a:rPr>
+                      <m:t>50</m:t>
+                    </m:r>
+                    <m:r>
+                      <a:rPr lang="pt-BR" sz="2400">
+                        <a:latin typeface="Cambria Math"/>
+                      </a:rPr>
+                      <m:t>)=</m:t>
                     </m:r>
                     <m:r>
                       <a:rPr lang="pt-BR" sz="2400">
@@ -17857,7 +17733,19 @@
                       <a:rPr lang="pt-BR" sz="2400">
                         <a:latin typeface="Cambria Math"/>
                       </a:rPr>
-                      <m:t>≤−1)=</m:t>
+                      <m:t>≤−</m:t>
+                    </m:r>
+                    <m:r>
+                      <a:rPr lang="pt-BR" sz="2400">
+                        <a:latin typeface="Cambria Math"/>
+                      </a:rPr>
+                      <m:t>1</m:t>
+                    </m:r>
+                    <m:r>
+                      <a:rPr lang="pt-BR" sz="2400">
+                        <a:latin typeface="Cambria Math"/>
+                      </a:rPr>
+                      <m:t>)=</m:t>
                     </m:r>
                     <m:r>
                       <a:rPr lang="pt-BR" sz="2400">
@@ -17881,7 +17769,43 @@
                       <a:rPr lang="pt-BR" sz="2400">
                         <a:latin typeface="Cambria Math"/>
                       </a:rPr>
-                      <m:t>≥1)=0,5−</m:t>
+                      <m:t>≥</m:t>
+                    </m:r>
+                    <m:r>
+                      <a:rPr lang="pt-BR" sz="2400">
+                        <a:latin typeface="Cambria Math"/>
+                      </a:rPr>
+                      <m:t>1</m:t>
+                    </m:r>
+                    <m:r>
+                      <a:rPr lang="pt-BR" sz="2400">
+                        <a:latin typeface="Cambria Math"/>
+                      </a:rPr>
+                      <m:t>)=</m:t>
+                    </m:r>
+                    <m:r>
+                      <a:rPr lang="pt-BR" sz="2400">
+                        <a:latin typeface="Cambria Math"/>
+                      </a:rPr>
+                      <m:t>0</m:t>
+                    </m:r>
+                    <m:r>
+                      <a:rPr lang="pt-BR" sz="2400">
+                        <a:latin typeface="Cambria Math"/>
+                      </a:rPr>
+                      <m:t>,</m:t>
+                    </m:r>
+                    <m:r>
+                      <a:rPr lang="pt-BR" sz="2400">
+                        <a:latin typeface="Cambria Math"/>
+                      </a:rPr>
+                      <m:t>5</m:t>
+                    </m:r>
+                    <m:r>
+                      <a:rPr lang="pt-BR" sz="2400">
+                        <a:latin typeface="Cambria Math"/>
+                      </a:rPr>
+                      <m:t>−</m:t>
                     </m:r>
                     <m:r>
                       <a:rPr lang="pt-BR" sz="2400">
@@ -17893,7 +17817,19 @@
                       <a:rPr lang="pt-BR" sz="2400">
                         <a:latin typeface="Cambria Math"/>
                       </a:rPr>
-                      <m:t>(0≤</m:t>
+                      <m:t>(</m:t>
+                    </m:r>
+                    <m:r>
+                      <a:rPr lang="pt-BR" sz="2400">
+                        <a:latin typeface="Cambria Math"/>
+                      </a:rPr>
+                      <m:t>0</m:t>
+                    </m:r>
+                    <m:r>
+                      <a:rPr lang="pt-BR" sz="2400">
+                        <a:latin typeface="Cambria Math"/>
+                      </a:rPr>
+                      <m:t>≤</m:t>
                     </m:r>
                     <m:r>
                       <a:rPr lang="pt-BR" sz="2400">
@@ -17905,7 +17841,19 @@
                       <a:rPr lang="pt-BR" sz="2400">
                         <a:latin typeface="Cambria Math"/>
                       </a:rPr>
-                      <m:t>≤1)</m:t>
+                      <m:t>≤</m:t>
+                    </m:r>
+                    <m:r>
+                      <a:rPr lang="pt-BR" sz="2400">
+                        <a:latin typeface="Cambria Math"/>
+                      </a:rPr>
+                      <m:t>1</m:t>
+                    </m:r>
+                    <m:r>
+                      <a:rPr lang="pt-BR" sz="2400">
+                        <a:latin typeface="Cambria Math"/>
+                      </a:rPr>
+                      <m:t>)</m:t>
                     </m:r>
                   </m:oMath>
                 </a14:m>
@@ -17927,7 +17875,73 @@
                         <a:rPr lang="pt-BR" sz="2400">
                           <a:latin typeface="Cambria Math"/>
                         </a:rPr>
-                        <m:t>=0,5−0,3413=0,1587</m:t>
+                        <m:t>=</m:t>
+                      </m:r>
+                      <m:r>
+                        <a:rPr lang="pt-BR" sz="2400">
+                          <a:latin typeface="Cambria Math"/>
+                        </a:rPr>
+                        <m:t>0</m:t>
+                      </m:r>
+                      <m:r>
+                        <a:rPr lang="pt-BR" sz="2400">
+                          <a:latin typeface="Cambria Math"/>
+                        </a:rPr>
+                        <m:t>,</m:t>
+                      </m:r>
+                      <m:r>
+                        <a:rPr lang="pt-BR" sz="2400">
+                          <a:latin typeface="Cambria Math"/>
+                        </a:rPr>
+                        <m:t>5</m:t>
+                      </m:r>
+                      <m:r>
+                        <a:rPr lang="pt-BR" sz="2400">
+                          <a:latin typeface="Cambria Math"/>
+                        </a:rPr>
+                        <m:t>−</m:t>
+                      </m:r>
+                      <m:r>
+                        <a:rPr lang="pt-BR" sz="2400">
+                          <a:latin typeface="Cambria Math"/>
+                        </a:rPr>
+                        <m:t>0</m:t>
+                      </m:r>
+                      <m:r>
+                        <a:rPr lang="pt-BR" sz="2400">
+                          <a:latin typeface="Cambria Math"/>
+                        </a:rPr>
+                        <m:t>,</m:t>
+                      </m:r>
+                      <m:r>
+                        <a:rPr lang="pt-BR" sz="2400">
+                          <a:latin typeface="Cambria Math"/>
+                        </a:rPr>
+                        <m:t>3413</m:t>
+                      </m:r>
+                      <m:r>
+                        <a:rPr lang="pt-BR" sz="2400">
+                          <a:latin typeface="Cambria Math"/>
+                        </a:rPr>
+                        <m:t>=</m:t>
+                      </m:r>
+                      <m:r>
+                        <a:rPr lang="pt-BR" sz="2400">
+                          <a:latin typeface="Cambria Math"/>
+                        </a:rPr>
+                        <m:t>0</m:t>
+                      </m:r>
+                      <m:r>
+                        <a:rPr lang="pt-BR" sz="2400">
+                          <a:latin typeface="Cambria Math"/>
+                        </a:rPr>
+                        <m:t>,</m:t>
+                      </m:r>
+                      <m:r>
+                        <a:rPr lang="pt-BR" sz="2400">
+                          <a:latin typeface="Cambria Math"/>
+                        </a:rPr>
+                        <m:t>1587</m:t>
                       </m:r>
                     </m:oMath>
                   </m:oMathPara>
@@ -19190,8 +19204,8 @@
           <a:chExt cx="0" cy="0"/>
         </a:xfrm>
       </p:grpSpPr>
-      <mc:AlternateContent xmlns:mc="http://schemas.openxmlformats.org/markup-compatibility/2006">
-        <mc:Choice xmlns:a14="http://schemas.microsoft.com/office/drawing/2010/main" Requires="a14">
+      <mc:AlternateContent xmlns:mc="http://schemas.openxmlformats.org/markup-compatibility/2006" xmlns:a14="http://schemas.microsoft.com/office/drawing/2010/main">
+        <mc:Choice Requires="a14">
           <p:sp>
             <p:nvSpPr>
               <p:cNvPr id="6" name="CaixaDeTexto 5">
@@ -19306,7 +19320,13 @@
                       <a:rPr lang="pt-BR" sz="2400" b="0" i="1" smtClean="0">
                         <a:latin typeface="Cambria Math" panose="02040503050406030204" pitchFamily="18" charset="0"/>
                       </a:rPr>
-                      <m:t>=0</m:t>
+                      <m:t>=</m:t>
+                    </m:r>
+                    <m:r>
+                      <a:rPr lang="pt-BR" sz="2400" b="0" i="1" smtClean="0">
+                        <a:latin typeface="Cambria Math" panose="02040503050406030204" pitchFamily="18" charset="0"/>
+                      </a:rPr>
+                      <m:t>0</m:t>
                     </m:r>
                   </m:oMath>
                 </a14:m>
@@ -19345,7 +19365,13 @@
                       <a:rPr lang="pt-BR" sz="2400" b="0" i="1" smtClean="0">
                         <a:latin typeface="Cambria Math" panose="02040503050406030204" pitchFamily="18" charset="0"/>
                       </a:rPr>
-                      <m:t>=1</m:t>
+                      <m:t>=</m:t>
+                    </m:r>
+                    <m:r>
+                      <a:rPr lang="pt-BR" sz="2400" b="0" i="1" smtClean="0">
+                        <a:latin typeface="Cambria Math" panose="02040503050406030204" pitchFamily="18" charset="0"/>
+                      </a:rPr>
+                      <m:t>1</m:t>
                     </m:r>
                   </m:oMath>
                 </a14:m>
@@ -19556,7 +19582,19 @@
                         <a:rPr lang="pt-BR" sz="2400" i="1" dirty="0" smtClean="0">
                           <a:latin typeface="Cambria Math" panose="02040503050406030204" pitchFamily="18" charset="0"/>
                         </a:rPr>
-                        <m:t> &lt;∞.</m:t>
+                        <m:t> &lt;</m:t>
+                      </m:r>
+                      <m:r>
+                        <a:rPr lang="pt-BR" sz="2400" i="1" dirty="0" smtClean="0">
+                          <a:latin typeface="Cambria Math" panose="02040503050406030204" pitchFamily="18" charset="0"/>
+                        </a:rPr>
+                        <m:t>∞</m:t>
+                      </m:r>
+                      <m:r>
+                        <a:rPr lang="pt-BR" sz="2400" i="1" dirty="0" smtClean="0">
+                          <a:latin typeface="Cambria Math" panose="02040503050406030204" pitchFamily="18" charset="0"/>
+                        </a:rPr>
+                        <m:t>.</m:t>
                       </m:r>
                     </m:oMath>
                   </m:oMathPara>
@@ -19634,7 +19672,19 @@
                           <a:rPr lang="pt-BR" sz="2400" b="0" i="1" smtClean="0">
                             <a:latin typeface="Cambria Math" panose="02040503050406030204" pitchFamily="18" charset="0"/>
                           </a:rPr>
-                          <m:t>0,1</m:t>
+                          <m:t>0</m:t>
+                        </m:r>
+                        <m:r>
+                          <a:rPr lang="pt-BR" sz="2400" b="0" i="1" smtClean="0">
+                            <a:latin typeface="Cambria Math" panose="02040503050406030204" pitchFamily="18" charset="0"/>
+                          </a:rPr>
+                          <m:t>,</m:t>
+                        </m:r>
+                        <m:r>
+                          <a:rPr lang="pt-BR" sz="2400" b="0" i="1" smtClean="0">
+                            <a:latin typeface="Cambria Math" panose="02040503050406030204" pitchFamily="18" charset="0"/>
+                          </a:rPr>
+                          <m:t>1</m:t>
                         </m:r>
                       </m:e>
                     </m:d>
@@ -19651,7 +19701,7 @@
             </p:txBody>
           </p:sp>
         </mc:Choice>
-        <mc:Fallback>
+        <mc:Fallback xmlns="">
           <p:sp>
             <p:nvSpPr>
               <p:cNvPr id="6" name="CaixaDeTexto 5">
@@ -19904,8 +19954,8 @@
           <a:chExt cx="0" cy="0"/>
         </a:xfrm>
       </p:grpSpPr>
-      <mc:AlternateContent xmlns:mc="http://schemas.openxmlformats.org/markup-compatibility/2006">
-        <mc:Choice xmlns:a14="http://schemas.microsoft.com/office/drawing/2010/main" Requires="a14">
+      <mc:AlternateContent xmlns:mc="http://schemas.openxmlformats.org/markup-compatibility/2006" xmlns:a14="http://schemas.microsoft.com/office/drawing/2010/main">
+        <mc:Choice Requires="a14">
           <p:sp>
             <p:nvSpPr>
               <p:cNvPr id="6" name="CaixaDeTexto 5">
@@ -20354,7 +20404,7 @@
             </p:txBody>
           </p:sp>
         </mc:Choice>
-        <mc:Fallback>
+        <mc:Fallback xmlns="">
           <p:sp>
             <p:nvSpPr>
               <p:cNvPr id="6" name="CaixaDeTexto 5">
